--- a/docs/pptx/auc3/ritu-auc3-linsubhr-sens-throm2_10pct.pptx
+++ b/docs/pptx/auc3/ritu-auc3-linsubhr-sens-throm2_10pct.pptx
@@ -2443,7 +2443,7 @@
           </p:nvSpPr>
           <p:spPr>
             <a:xfrm>
-              <a:off x="1342929" y="2073503"/>
+              <a:off x="1343231" y="2073503"/>
               <a:ext cx="0" cy="3649639"/>
             </a:xfrm>
             <a:custGeom>
@@ -2486,7 +2486,7 @@
           </p:nvSpPr>
           <p:spPr>
             <a:xfrm>
-              <a:off x="2182565" y="2073503"/>
+              <a:off x="2181282" y="2073503"/>
               <a:ext cx="0" cy="3649639"/>
             </a:xfrm>
             <a:custGeom>
@@ -2529,7 +2529,7 @@
           </p:nvSpPr>
           <p:spPr>
             <a:xfrm>
-              <a:off x="3022201" y="2073503"/>
+              <a:off x="3019333" y="2073503"/>
               <a:ext cx="0" cy="3649639"/>
             </a:xfrm>
             <a:custGeom>
@@ -2572,7 +2572,7 @@
           </p:nvSpPr>
           <p:spPr>
             <a:xfrm>
-              <a:off x="3861838" y="2073503"/>
+              <a:off x="3857383" y="2073503"/>
               <a:ext cx="0" cy="3649639"/>
             </a:xfrm>
             <a:custGeom>
@@ -2615,7 +2615,7 @@
           </p:nvSpPr>
           <p:spPr>
             <a:xfrm>
-              <a:off x="4701474" y="2073503"/>
+              <a:off x="4695434" y="2073503"/>
               <a:ext cx="0" cy="3649639"/>
             </a:xfrm>
             <a:custGeom>
@@ -2658,7 +2658,7 @@
           </p:nvSpPr>
           <p:spPr>
             <a:xfrm>
-              <a:off x="5541110" y="2073503"/>
+              <a:off x="5533485" y="2073503"/>
               <a:ext cx="0" cy="3649639"/>
             </a:xfrm>
             <a:custGeom>
@@ -2701,7 +2701,7 @@
           </p:nvSpPr>
           <p:spPr>
             <a:xfrm>
-              <a:off x="6380746" y="2073503"/>
+              <a:off x="6371535" y="2073503"/>
               <a:ext cx="0" cy="3649639"/>
             </a:xfrm>
             <a:custGeom>
@@ -2744,7 +2744,7 @@
           </p:nvSpPr>
           <p:spPr>
             <a:xfrm>
-              <a:off x="7220382" y="2073503"/>
+              <a:off x="7209586" y="2073503"/>
               <a:ext cx="0" cy="3649639"/>
             </a:xfrm>
             <a:custGeom>
@@ -2787,7 +2787,7 @@
           </p:nvSpPr>
           <p:spPr>
             <a:xfrm>
-              <a:off x="8060018" y="2073503"/>
+              <a:off x="8047636" y="2073503"/>
               <a:ext cx="0" cy="3649639"/>
             </a:xfrm>
             <a:custGeom>
@@ -3045,7 +3045,7 @@
           </p:nvSpPr>
           <p:spPr>
             <a:xfrm>
-              <a:off x="923111" y="2073503"/>
+              <a:off x="924206" y="2073503"/>
               <a:ext cx="0" cy="3649639"/>
             </a:xfrm>
             <a:custGeom>
@@ -3088,7 +3088,7 @@
           </p:nvSpPr>
           <p:spPr>
             <a:xfrm>
-              <a:off x="1762747" y="2073503"/>
+              <a:off x="1762257" y="2073503"/>
               <a:ext cx="0" cy="3649639"/>
             </a:xfrm>
             <a:custGeom>
@@ -3131,7 +3131,7 @@
           </p:nvSpPr>
           <p:spPr>
             <a:xfrm>
-              <a:off x="2602383" y="2073503"/>
+              <a:off x="2600307" y="2073503"/>
               <a:ext cx="0" cy="3649639"/>
             </a:xfrm>
             <a:custGeom>
@@ -3174,7 +3174,7 @@
           </p:nvSpPr>
           <p:spPr>
             <a:xfrm>
-              <a:off x="3442019" y="2073503"/>
+              <a:off x="3438358" y="2073503"/>
               <a:ext cx="0" cy="3649639"/>
             </a:xfrm>
             <a:custGeom>
@@ -3217,7 +3217,7 @@
           </p:nvSpPr>
           <p:spPr>
             <a:xfrm>
-              <a:off x="4281656" y="2073503"/>
+              <a:off x="4276409" y="2073503"/>
               <a:ext cx="0" cy="3649639"/>
             </a:xfrm>
             <a:custGeom>
@@ -3260,7 +3260,7 @@
           </p:nvSpPr>
           <p:spPr>
             <a:xfrm>
-              <a:off x="5121292" y="2073503"/>
+              <a:off x="5114459" y="2073503"/>
               <a:ext cx="0" cy="3649639"/>
             </a:xfrm>
             <a:custGeom>
@@ -3303,7 +3303,7 @@
           </p:nvSpPr>
           <p:spPr>
             <a:xfrm>
-              <a:off x="5960928" y="2073503"/>
+              <a:off x="5952510" y="2073503"/>
               <a:ext cx="0" cy="3649639"/>
             </a:xfrm>
             <a:custGeom>
@@ -3346,7 +3346,7 @@
           </p:nvSpPr>
           <p:spPr>
             <a:xfrm>
-              <a:off x="6800564" y="2073503"/>
+              <a:off x="6790560" y="2073503"/>
               <a:ext cx="0" cy="3649639"/>
             </a:xfrm>
             <a:custGeom>
@@ -3389,7 +3389,7 @@
           </p:nvSpPr>
           <p:spPr>
             <a:xfrm>
-              <a:off x="7640200" y="2073503"/>
+              <a:off x="7628611" y="2073503"/>
               <a:ext cx="0" cy="3649639"/>
             </a:xfrm>
             <a:custGeom>
@@ -3432,7 +3432,7 @@
           </p:nvSpPr>
           <p:spPr>
             <a:xfrm>
-              <a:off x="8479836" y="2073503"/>
+              <a:off x="8466662" y="2073503"/>
               <a:ext cx="0" cy="3649639"/>
             </a:xfrm>
             <a:custGeom>
@@ -3476,524 +3476,524 @@
           <p:spPr>
             <a:xfrm>
               <a:off x="1172049" y="2073503"/>
-              <a:ext cx="7090630" cy="3431791"/>
+              <a:ext cx="7090630" cy="3433022"/>
             </a:xfrm>
             <a:custGeom>
               <a:avLst/>
               <a:pathLst>
-                <a:path w="7090630" h="3431791">
+                <a:path w="7090630" h="3433022">
                   <a:moveTo>
-                    <a:pt x="0" y="727964"/>
+                    <a:pt x="0" y="699180"/>
                   </a:moveTo>
                   <a:lnTo>
-                    <a:pt x="71622" y="800368"/>
-                  </a:lnTo>
-                  <a:lnTo>
-                    <a:pt x="143245" y="870871"/>
-                  </a:lnTo>
-                  <a:lnTo>
-                    <a:pt x="214867" y="939520"/>
-                  </a:lnTo>
-                  <a:lnTo>
-                    <a:pt x="286490" y="1006366"/>
-                  </a:lnTo>
-                  <a:lnTo>
-                    <a:pt x="358112" y="1071456"/>
-                  </a:lnTo>
-                  <a:lnTo>
-                    <a:pt x="429735" y="1134836"/>
-                  </a:lnTo>
-                  <a:lnTo>
-                    <a:pt x="501357" y="1196550"/>
-                  </a:lnTo>
-                  <a:lnTo>
-                    <a:pt x="572980" y="1256643"/>
-                  </a:lnTo>
-                  <a:lnTo>
-                    <a:pt x="644602" y="1315158"/>
-                  </a:lnTo>
-                  <a:lnTo>
-                    <a:pt x="716225" y="1372134"/>
-                  </a:lnTo>
-                  <a:lnTo>
-                    <a:pt x="787847" y="1427614"/>
-                  </a:lnTo>
-                  <a:lnTo>
-                    <a:pt x="859470" y="1481636"/>
-                  </a:lnTo>
-                  <a:lnTo>
-                    <a:pt x="931092" y="1534239"/>
-                  </a:lnTo>
-                  <a:lnTo>
-                    <a:pt x="1002715" y="1585460"/>
-                  </a:lnTo>
-                  <a:lnTo>
-                    <a:pt x="1074337" y="1635334"/>
-                  </a:lnTo>
-                  <a:lnTo>
-                    <a:pt x="1145960" y="1683899"/>
-                  </a:lnTo>
-                  <a:lnTo>
-                    <a:pt x="1217582" y="1731188"/>
-                  </a:lnTo>
-                  <a:lnTo>
-                    <a:pt x="1289205" y="1777234"/>
-                  </a:lnTo>
-                  <a:lnTo>
-                    <a:pt x="1360827" y="1822070"/>
-                  </a:lnTo>
-                  <a:lnTo>
-                    <a:pt x="1432450" y="1865728"/>
-                  </a:lnTo>
-                  <a:lnTo>
-                    <a:pt x="1504073" y="1908240"/>
-                  </a:lnTo>
-                  <a:lnTo>
-                    <a:pt x="1575695" y="1949634"/>
-                  </a:lnTo>
-                  <a:lnTo>
-                    <a:pt x="1647318" y="1989941"/>
-                  </a:lnTo>
-                  <a:lnTo>
-                    <a:pt x="1718940" y="2029188"/>
-                  </a:lnTo>
-                  <a:lnTo>
-                    <a:pt x="1790563" y="2067405"/>
-                  </a:lnTo>
-                  <a:lnTo>
-                    <a:pt x="1862185" y="2104617"/>
-                  </a:lnTo>
-                  <a:lnTo>
-                    <a:pt x="1933808" y="2140852"/>
-                  </a:lnTo>
-                  <a:lnTo>
-                    <a:pt x="2005430" y="2176135"/>
-                  </a:lnTo>
-                  <a:lnTo>
-                    <a:pt x="2077053" y="2210491"/>
-                  </a:lnTo>
-                  <a:lnTo>
-                    <a:pt x="2148675" y="2243944"/>
-                  </a:lnTo>
-                  <a:lnTo>
-                    <a:pt x="2220298" y="2276518"/>
-                  </a:lnTo>
-                  <a:lnTo>
-                    <a:pt x="2291920" y="2308236"/>
-                  </a:lnTo>
-                  <a:lnTo>
-                    <a:pt x="2363543" y="2339121"/>
-                  </a:lnTo>
-                  <a:lnTo>
-                    <a:pt x="2435165" y="2369195"/>
-                  </a:lnTo>
-                  <a:lnTo>
-                    <a:pt x="2506788" y="2398478"/>
-                  </a:lnTo>
-                  <a:lnTo>
-                    <a:pt x="2578410" y="2426992"/>
-                  </a:lnTo>
-                  <a:lnTo>
-                    <a:pt x="2650033" y="2454757"/>
-                  </a:lnTo>
-                  <a:lnTo>
-                    <a:pt x="2721655" y="2481792"/>
-                  </a:lnTo>
-                  <a:lnTo>
-                    <a:pt x="2793278" y="2508117"/>
-                  </a:lnTo>
-                  <a:lnTo>
-                    <a:pt x="2864901" y="2533750"/>
-                  </a:lnTo>
-                  <a:lnTo>
-                    <a:pt x="2936523" y="2558710"/>
-                  </a:lnTo>
-                  <a:lnTo>
-                    <a:pt x="3008146" y="2583014"/>
-                  </a:lnTo>
-                  <a:lnTo>
-                    <a:pt x="3079768" y="2606680"/>
-                  </a:lnTo>
-                  <a:lnTo>
-                    <a:pt x="3151391" y="2629724"/>
-                  </a:lnTo>
-                  <a:lnTo>
-                    <a:pt x="3223013" y="2652162"/>
-                  </a:lnTo>
-                  <a:lnTo>
-                    <a:pt x="3294636" y="2606910"/>
-                  </a:lnTo>
-                  <a:lnTo>
-                    <a:pt x="3366258" y="2551355"/>
-                  </a:lnTo>
-                  <a:lnTo>
-                    <a:pt x="3437881" y="2492279"/>
-                  </a:lnTo>
-                  <a:lnTo>
-                    <a:pt x="3509503" y="2429460"/>
-                  </a:lnTo>
-                  <a:lnTo>
-                    <a:pt x="3581126" y="2362660"/>
-                  </a:lnTo>
-                  <a:lnTo>
-                    <a:pt x="3652748" y="2291629"/>
-                  </a:lnTo>
-                  <a:lnTo>
-                    <a:pt x="3724371" y="2216097"/>
-                  </a:lnTo>
-                  <a:lnTo>
-                    <a:pt x="3795993" y="2135779"/>
-                  </a:lnTo>
-                  <a:lnTo>
-                    <a:pt x="3867616" y="2050372"/>
-                  </a:lnTo>
-                  <a:lnTo>
-                    <a:pt x="3939238" y="1959554"/>
-                  </a:lnTo>
-                  <a:lnTo>
-                    <a:pt x="4010861" y="1862982"/>
-                  </a:lnTo>
-                  <a:lnTo>
-                    <a:pt x="4082483" y="1760291"/>
-                  </a:lnTo>
-                  <a:lnTo>
-                    <a:pt x="4154106" y="1651094"/>
-                  </a:lnTo>
-                  <a:lnTo>
-                    <a:pt x="4225729" y="1534977"/>
-                  </a:lnTo>
-                  <a:lnTo>
-                    <a:pt x="4297351" y="1411504"/>
-                  </a:lnTo>
-                  <a:lnTo>
-                    <a:pt x="4368974" y="1280208"/>
-                  </a:lnTo>
-                  <a:lnTo>
-                    <a:pt x="4440596" y="1140593"/>
-                  </a:lnTo>
-                  <a:lnTo>
-                    <a:pt x="4512219" y="992131"/>
-                  </a:lnTo>
-                  <a:lnTo>
-                    <a:pt x="4583841" y="834264"/>
-                  </a:lnTo>
-                  <a:lnTo>
-                    <a:pt x="4655464" y="666393"/>
-                  </a:lnTo>
-                  <a:lnTo>
-                    <a:pt x="4727086" y="487887"/>
-                  </a:lnTo>
-                  <a:lnTo>
-                    <a:pt x="4798709" y="298071"/>
-                  </a:lnTo>
-                  <a:lnTo>
-                    <a:pt x="4870331" y="96227"/>
-                  </a:lnTo>
-                  <a:lnTo>
-                    <a:pt x="4902442" y="0"/>
+                    <a:pt x="71622" y="772478"/>
+                  </a:lnTo>
+                  <a:lnTo>
+                    <a:pt x="143245" y="843845"/>
+                  </a:lnTo>
+                  <a:lnTo>
+                    <a:pt x="214867" y="913335"/>
+                  </a:lnTo>
+                  <a:lnTo>
+                    <a:pt x="286490" y="980995"/>
+                  </a:lnTo>
+                  <a:lnTo>
+                    <a:pt x="358112" y="1046874"/>
+                  </a:lnTo>
+                  <a:lnTo>
+                    <a:pt x="429735" y="1111019"/>
+                  </a:lnTo>
+                  <a:lnTo>
+                    <a:pt x="501357" y="1173475"/>
+                  </a:lnTo>
+                  <a:lnTo>
+                    <a:pt x="572980" y="1234288"/>
+                  </a:lnTo>
+                  <a:lnTo>
+                    <a:pt x="644602" y="1293500"/>
+                  </a:lnTo>
+                  <a:lnTo>
+                    <a:pt x="716225" y="1351153"/>
+                  </a:lnTo>
+                  <a:lnTo>
+                    <a:pt x="787847" y="1407288"/>
+                  </a:lnTo>
+                  <a:lnTo>
+                    <a:pt x="859470" y="1461946"/>
+                  </a:lnTo>
+                  <a:lnTo>
+                    <a:pt x="931092" y="1515165"/>
+                  </a:lnTo>
+                  <a:lnTo>
+                    <a:pt x="1002715" y="1566984"/>
+                  </a:lnTo>
+                  <a:lnTo>
+                    <a:pt x="1074337" y="1617438"/>
+                  </a:lnTo>
+                  <a:lnTo>
+                    <a:pt x="1145960" y="1666564"/>
+                  </a:lnTo>
+                  <a:lnTo>
+                    <a:pt x="1217582" y="1714397"/>
+                  </a:lnTo>
+                  <a:lnTo>
+                    <a:pt x="1289205" y="1760971"/>
+                  </a:lnTo>
+                  <a:lnTo>
+                    <a:pt x="1360827" y="1806319"/>
+                  </a:lnTo>
+                  <a:lnTo>
+                    <a:pt x="1432450" y="1850474"/>
+                  </a:lnTo>
+                  <a:lnTo>
+                    <a:pt x="1504073" y="1893466"/>
+                  </a:lnTo>
+                  <a:lnTo>
+                    <a:pt x="1575695" y="1935326"/>
+                  </a:lnTo>
+                  <a:lnTo>
+                    <a:pt x="1647318" y="1976085"/>
+                  </a:lnTo>
+                  <a:lnTo>
+                    <a:pt x="1718940" y="2015770"/>
+                  </a:lnTo>
+                  <a:lnTo>
+                    <a:pt x="1790563" y="2054411"/>
+                  </a:lnTo>
+                  <a:lnTo>
+                    <a:pt x="1862185" y="2092035"/>
+                  </a:lnTo>
+                  <a:lnTo>
+                    <a:pt x="1933808" y="2128669"/>
+                  </a:lnTo>
+                  <a:lnTo>
+                    <a:pt x="2005430" y="2164338"/>
+                  </a:lnTo>
+                  <a:lnTo>
+                    <a:pt x="2077053" y="2199069"/>
+                  </a:lnTo>
+                  <a:lnTo>
+                    <a:pt x="2148675" y="2232885"/>
+                  </a:lnTo>
+                  <a:lnTo>
+                    <a:pt x="2220298" y="2265811"/>
+                  </a:lnTo>
+                  <a:lnTo>
+                    <a:pt x="2291920" y="2297870"/>
+                  </a:lnTo>
+                  <a:lnTo>
+                    <a:pt x="2363543" y="2329085"/>
+                  </a:lnTo>
+                  <a:lnTo>
+                    <a:pt x="2435165" y="2359479"/>
+                  </a:lnTo>
+                  <a:lnTo>
+                    <a:pt x="2506788" y="2389073"/>
+                  </a:lnTo>
+                  <a:lnTo>
+                    <a:pt x="2578410" y="2417888"/>
+                  </a:lnTo>
+                  <a:lnTo>
+                    <a:pt x="2650033" y="2445944"/>
+                  </a:lnTo>
+                  <a:lnTo>
+                    <a:pt x="2721655" y="2473262"/>
+                  </a:lnTo>
+                  <a:lnTo>
+                    <a:pt x="2793278" y="2499860"/>
+                  </a:lnTo>
+                  <a:lnTo>
+                    <a:pt x="2864901" y="2525759"/>
+                  </a:lnTo>
+                  <a:lnTo>
+                    <a:pt x="2936523" y="2550976"/>
+                  </a:lnTo>
+                  <a:lnTo>
+                    <a:pt x="3008146" y="2575529"/>
+                  </a:lnTo>
+                  <a:lnTo>
+                    <a:pt x="3079768" y="2599435"/>
+                  </a:lnTo>
+                  <a:lnTo>
+                    <a:pt x="3151391" y="2622713"/>
+                  </a:lnTo>
+                  <a:lnTo>
+                    <a:pt x="3223013" y="2645377"/>
+                  </a:lnTo>
+                  <a:lnTo>
+                    <a:pt x="3294636" y="2623096"/>
+                  </a:lnTo>
+                  <a:lnTo>
+                    <a:pt x="3366258" y="2568459"/>
+                  </a:lnTo>
+                  <a:lnTo>
+                    <a:pt x="3437881" y="2510354"/>
+                  </a:lnTo>
+                  <a:lnTo>
+                    <a:pt x="3509503" y="2448560"/>
+                  </a:lnTo>
+                  <a:lnTo>
+                    <a:pt x="3581126" y="2382843"/>
+                  </a:lnTo>
+                  <a:lnTo>
+                    <a:pt x="3652748" y="2312954"/>
+                  </a:lnTo>
+                  <a:lnTo>
+                    <a:pt x="3724371" y="2238629"/>
+                  </a:lnTo>
+                  <a:lnTo>
+                    <a:pt x="3795993" y="2159585"/>
+                  </a:lnTo>
+                  <a:lnTo>
+                    <a:pt x="3867616" y="2075523"/>
+                  </a:lnTo>
+                  <a:lnTo>
+                    <a:pt x="3939238" y="1986124"/>
+                  </a:lnTo>
+                  <a:lnTo>
+                    <a:pt x="4010861" y="1891051"/>
+                  </a:lnTo>
+                  <a:lnTo>
+                    <a:pt x="4082483" y="1789941"/>
+                  </a:lnTo>
+                  <a:lnTo>
+                    <a:pt x="4154106" y="1682413"/>
+                  </a:lnTo>
+                  <a:lnTo>
+                    <a:pt x="4225729" y="1568059"/>
+                  </a:lnTo>
+                  <a:lnTo>
+                    <a:pt x="4297351" y="1446445"/>
+                  </a:lnTo>
+                  <a:lnTo>
+                    <a:pt x="4368974" y="1317110"/>
+                  </a:lnTo>
+                  <a:lnTo>
+                    <a:pt x="4440596" y="1179566"/>
+                  </a:lnTo>
+                  <a:lnTo>
+                    <a:pt x="4512219" y="1033289"/>
+                  </a:lnTo>
+                  <a:lnTo>
+                    <a:pt x="4583841" y="877726"/>
+                  </a:lnTo>
+                  <a:lnTo>
+                    <a:pt x="4655464" y="712288"/>
+                  </a:lnTo>
+                  <a:lnTo>
+                    <a:pt x="4727086" y="536347"/>
+                  </a:lnTo>
+                  <a:lnTo>
+                    <a:pt x="4798709" y="349236"/>
+                  </a:lnTo>
+                  <a:lnTo>
+                    <a:pt x="4870331" y="150248"/>
+                  </a:lnTo>
+                  <a:lnTo>
+                    <a:pt x="4921182" y="0"/>
                   </a:lnTo>
                   <a:lnTo>
                     <a:pt x="7090630" y="0"/>
                   </a:lnTo>
                   <a:lnTo>
-                    <a:pt x="7090630" y="3286277"/>
-                  </a:lnTo>
-                  <a:lnTo>
-                    <a:pt x="7019007" y="3280949"/>
-                  </a:lnTo>
-                  <a:lnTo>
-                    <a:pt x="6947385" y="3275477"/>
-                  </a:lnTo>
-                  <a:lnTo>
-                    <a:pt x="6875762" y="3269857"/>
-                  </a:lnTo>
-                  <a:lnTo>
-                    <a:pt x="6804139" y="3264086"/>
-                  </a:lnTo>
-                  <a:lnTo>
-                    <a:pt x="6732517" y="3258159"/>
-                  </a:lnTo>
-                  <a:lnTo>
-                    <a:pt x="6660894" y="3252072"/>
-                  </a:lnTo>
-                  <a:lnTo>
-                    <a:pt x="6589272" y="3245820"/>
-                  </a:lnTo>
-                  <a:lnTo>
-                    <a:pt x="6517649" y="3239401"/>
-                  </a:lnTo>
-                  <a:lnTo>
-                    <a:pt x="6446027" y="3232808"/>
-                  </a:lnTo>
-                  <a:lnTo>
-                    <a:pt x="6374404" y="3226037"/>
-                  </a:lnTo>
-                  <a:lnTo>
-                    <a:pt x="6302782" y="3219083"/>
-                  </a:lnTo>
-                  <a:lnTo>
-                    <a:pt x="6231159" y="3211942"/>
-                  </a:lnTo>
-                  <a:lnTo>
-                    <a:pt x="6159537" y="3204608"/>
-                  </a:lnTo>
-                  <a:lnTo>
-                    <a:pt x="6087914" y="3197076"/>
-                  </a:lnTo>
-                  <a:lnTo>
-                    <a:pt x="6016292" y="3189341"/>
-                  </a:lnTo>
-                  <a:lnTo>
-                    <a:pt x="5944669" y="3181397"/>
-                  </a:lnTo>
-                  <a:lnTo>
-                    <a:pt x="5873047" y="3173239"/>
-                  </a:lnTo>
-                  <a:lnTo>
-                    <a:pt x="5801424" y="3164860"/>
-                  </a:lnTo>
-                  <a:lnTo>
-                    <a:pt x="5729802" y="3156256"/>
-                  </a:lnTo>
-                  <a:lnTo>
-                    <a:pt x="5658179" y="3147419"/>
-                  </a:lnTo>
-                  <a:lnTo>
-                    <a:pt x="5586557" y="3138344"/>
-                  </a:lnTo>
-                  <a:lnTo>
-                    <a:pt x="5514934" y="3129025"/>
-                  </a:lnTo>
-                  <a:lnTo>
-                    <a:pt x="5443311" y="3119453"/>
-                  </a:lnTo>
-                  <a:lnTo>
-                    <a:pt x="5371689" y="3109624"/>
-                  </a:lnTo>
-                  <a:lnTo>
-                    <a:pt x="5300066" y="3099529"/>
-                  </a:lnTo>
-                  <a:lnTo>
-                    <a:pt x="5228444" y="3089162"/>
-                  </a:lnTo>
-                  <a:lnTo>
-                    <a:pt x="5156821" y="3078515"/>
-                  </a:lnTo>
-                  <a:lnTo>
-                    <a:pt x="5085199" y="3067581"/>
-                  </a:lnTo>
-                  <a:lnTo>
-                    <a:pt x="5013576" y="3056351"/>
-                  </a:lnTo>
-                  <a:lnTo>
-                    <a:pt x="4941954" y="3044819"/>
-                  </a:lnTo>
-                  <a:lnTo>
-                    <a:pt x="4870331" y="3032976"/>
-                  </a:lnTo>
-                  <a:lnTo>
-                    <a:pt x="4798709" y="3020813"/>
-                  </a:lnTo>
-                  <a:lnTo>
-                    <a:pt x="4727086" y="3008322"/>
-                  </a:lnTo>
-                  <a:lnTo>
-                    <a:pt x="4655464" y="2995493"/>
-                  </a:lnTo>
-                  <a:lnTo>
-                    <a:pt x="4583841" y="2982319"/>
-                  </a:lnTo>
-                  <a:lnTo>
-                    <a:pt x="4512219" y="2968789"/>
-                  </a:lnTo>
-                  <a:lnTo>
-                    <a:pt x="4440596" y="2954894"/>
-                  </a:lnTo>
-                  <a:lnTo>
-                    <a:pt x="4368974" y="2940625"/>
-                  </a:lnTo>
-                  <a:lnTo>
-                    <a:pt x="4297351" y="2925970"/>
-                  </a:lnTo>
-                  <a:lnTo>
-                    <a:pt x="4225729" y="2910920"/>
-                  </a:lnTo>
-                  <a:lnTo>
-                    <a:pt x="4154106" y="2895463"/>
-                  </a:lnTo>
-                  <a:lnTo>
-                    <a:pt x="4082483" y="2879590"/>
-                  </a:lnTo>
-                  <a:lnTo>
-                    <a:pt x="4010861" y="2863288"/>
-                  </a:lnTo>
-                  <a:lnTo>
-                    <a:pt x="3939238" y="2846547"/>
-                  </a:lnTo>
-                  <a:lnTo>
-                    <a:pt x="3867616" y="2829353"/>
-                  </a:lnTo>
-                  <a:lnTo>
-                    <a:pt x="3795993" y="2811696"/>
-                  </a:lnTo>
-                  <a:lnTo>
-                    <a:pt x="3724371" y="2793562"/>
-                  </a:lnTo>
-                  <a:lnTo>
-                    <a:pt x="3652748" y="2774939"/>
-                  </a:lnTo>
-                  <a:lnTo>
-                    <a:pt x="3581126" y="2755814"/>
-                  </a:lnTo>
-                  <a:lnTo>
-                    <a:pt x="3509503" y="2736173"/>
-                  </a:lnTo>
-                  <a:lnTo>
-                    <a:pt x="3437881" y="2716001"/>
-                  </a:lnTo>
-                  <a:lnTo>
-                    <a:pt x="3366258" y="2695285"/>
-                  </a:lnTo>
-                  <a:lnTo>
-                    <a:pt x="3294636" y="2674011"/>
-                  </a:lnTo>
-                  <a:lnTo>
-                    <a:pt x="3223013" y="2659156"/>
-                  </a:lnTo>
-                  <a:lnTo>
-                    <a:pt x="3151391" y="2708289"/>
-                  </a:lnTo>
-                  <a:lnTo>
-                    <a:pt x="3079768" y="2754494"/>
-                  </a:lnTo>
-                  <a:lnTo>
-                    <a:pt x="3008146" y="2797946"/>
-                  </a:lnTo>
-                  <a:lnTo>
-                    <a:pt x="2936523" y="2838809"/>
-                  </a:lnTo>
-                  <a:lnTo>
-                    <a:pt x="2864901" y="2877237"/>
-                  </a:lnTo>
-                  <a:lnTo>
-                    <a:pt x="2793278" y="2913376"/>
-                  </a:lnTo>
-                  <a:lnTo>
-                    <a:pt x="2721655" y="2947361"/>
-                  </a:lnTo>
-                  <a:lnTo>
-                    <a:pt x="2650033" y="2979321"/>
-                  </a:lnTo>
-                  <a:lnTo>
-                    <a:pt x="2578410" y="3009377"/>
-                  </a:lnTo>
-                  <a:lnTo>
-                    <a:pt x="2506788" y="3037642"/>
-                  </a:lnTo>
-                  <a:lnTo>
-                    <a:pt x="2435165" y="3064223"/>
-                  </a:lnTo>
-                  <a:lnTo>
-                    <a:pt x="2363543" y="3089220"/>
-                  </a:lnTo>
-                  <a:lnTo>
-                    <a:pt x="2291920" y="3112727"/>
-                  </a:lnTo>
-                  <a:lnTo>
-                    <a:pt x="2220298" y="3134834"/>
-                  </a:lnTo>
-                  <a:lnTo>
-                    <a:pt x="2148675" y="3155624"/>
-                  </a:lnTo>
-                  <a:lnTo>
-                    <a:pt x="2077053" y="3175175"/>
-                  </a:lnTo>
-                  <a:lnTo>
-                    <a:pt x="2005430" y="3193561"/>
-                  </a:lnTo>
-                  <a:lnTo>
-                    <a:pt x="1933808" y="3210852"/>
-                  </a:lnTo>
-                  <a:lnTo>
-                    <a:pt x="1862185" y="3227112"/>
-                  </a:lnTo>
-                  <a:lnTo>
-                    <a:pt x="1790563" y="3242403"/>
-                  </a:lnTo>
-                  <a:lnTo>
-                    <a:pt x="1718940" y="3256783"/>
-                  </a:lnTo>
-                  <a:lnTo>
-                    <a:pt x="1647318" y="3270307"/>
-                  </a:lnTo>
-                  <a:lnTo>
-                    <a:pt x="1575695" y="3283025"/>
-                  </a:lnTo>
-                  <a:lnTo>
-                    <a:pt x="1504073" y="3294984"/>
-                  </a:lnTo>
-                  <a:lnTo>
-                    <a:pt x="1432450" y="3306232"/>
-                  </a:lnTo>
-                  <a:lnTo>
-                    <a:pt x="1360827" y="3316809"/>
-                  </a:lnTo>
-                  <a:lnTo>
-                    <a:pt x="1289205" y="3326756"/>
-                  </a:lnTo>
-                  <a:lnTo>
-                    <a:pt x="1217582" y="3336110"/>
-                  </a:lnTo>
-                  <a:lnTo>
-                    <a:pt x="1145960" y="3344907"/>
-                  </a:lnTo>
-                  <a:lnTo>
-                    <a:pt x="1074337" y="3353179"/>
-                  </a:lnTo>
-                  <a:lnTo>
-                    <a:pt x="1002715" y="3360959"/>
-                  </a:lnTo>
-                  <a:lnTo>
-                    <a:pt x="931092" y="3368275"/>
-                  </a:lnTo>
-                  <a:lnTo>
-                    <a:pt x="859470" y="3375156"/>
-                  </a:lnTo>
-                  <a:lnTo>
-                    <a:pt x="787847" y="3381626"/>
-                  </a:lnTo>
-                  <a:lnTo>
-                    <a:pt x="716225" y="3387711"/>
-                  </a:lnTo>
-                  <a:lnTo>
-                    <a:pt x="644602" y="3393433"/>
-                  </a:lnTo>
-                  <a:lnTo>
-                    <a:pt x="572980" y="3398814"/>
-                  </a:lnTo>
-                  <a:lnTo>
-                    <a:pt x="501357" y="3403875"/>
-                  </a:lnTo>
-                  <a:lnTo>
-                    <a:pt x="429735" y="3408634"/>
-                  </a:lnTo>
-                  <a:lnTo>
-                    <a:pt x="358112" y="3413109"/>
-                  </a:lnTo>
-                  <a:lnTo>
-                    <a:pt x="286490" y="3417318"/>
-                  </a:lnTo>
-                  <a:lnTo>
-                    <a:pt x="214867" y="3421276"/>
-                  </a:lnTo>
-                  <a:lnTo>
-                    <a:pt x="143245" y="3424999"/>
-                  </a:lnTo>
-                  <a:lnTo>
-                    <a:pt x="71622" y="3428499"/>
-                  </a:lnTo>
-                  <a:lnTo>
-                    <a:pt x="0" y="3431791"/>
+                    <a:pt x="7090630" y="3285206"/>
+                  </a:lnTo>
+                  <a:lnTo>
+                    <a:pt x="7019007" y="3279839"/>
+                  </a:lnTo>
+                  <a:lnTo>
+                    <a:pt x="6947385" y="3274326"/>
+                  </a:lnTo>
+                  <a:lnTo>
+                    <a:pt x="6875762" y="3268665"/>
+                  </a:lnTo>
+                  <a:lnTo>
+                    <a:pt x="6804139" y="3262850"/>
+                  </a:lnTo>
+                  <a:lnTo>
+                    <a:pt x="6732517" y="3256878"/>
+                  </a:lnTo>
+                  <a:lnTo>
+                    <a:pt x="6660894" y="3250745"/>
+                  </a:lnTo>
+                  <a:lnTo>
+                    <a:pt x="6589272" y="3244446"/>
+                  </a:lnTo>
+                  <a:lnTo>
+                    <a:pt x="6517649" y="3237977"/>
+                  </a:lnTo>
+                  <a:lnTo>
+                    <a:pt x="6446027" y="3231333"/>
+                  </a:lnTo>
+                  <a:lnTo>
+                    <a:pt x="6374404" y="3224509"/>
+                  </a:lnTo>
+                  <a:lnTo>
+                    <a:pt x="6302782" y="3217501"/>
+                  </a:lnTo>
+                  <a:lnTo>
+                    <a:pt x="6231159" y="3210303"/>
+                  </a:lnTo>
+                  <a:lnTo>
+                    <a:pt x="6159537" y="3202911"/>
+                  </a:lnTo>
+                  <a:lnTo>
+                    <a:pt x="6087914" y="3195318"/>
+                  </a:lnTo>
+                  <a:lnTo>
+                    <a:pt x="6016292" y="3187521"/>
+                  </a:lnTo>
+                  <a:lnTo>
+                    <a:pt x="5944669" y="3179513"/>
+                  </a:lnTo>
+                  <a:lnTo>
+                    <a:pt x="5873047" y="3171288"/>
+                  </a:lnTo>
+                  <a:lnTo>
+                    <a:pt x="5801424" y="3162841"/>
+                  </a:lnTo>
+                  <a:lnTo>
+                    <a:pt x="5729802" y="3154165"/>
+                  </a:lnTo>
+                  <a:lnTo>
+                    <a:pt x="5658179" y="3145255"/>
+                  </a:lnTo>
+                  <a:lnTo>
+                    <a:pt x="5586557" y="3136104"/>
+                  </a:lnTo>
+                  <a:lnTo>
+                    <a:pt x="5514934" y="3126706"/>
+                  </a:lnTo>
+                  <a:lnTo>
+                    <a:pt x="5443311" y="3117054"/>
+                  </a:lnTo>
+                  <a:lnTo>
+                    <a:pt x="5371689" y="3107141"/>
+                  </a:lnTo>
+                  <a:lnTo>
+                    <a:pt x="5300066" y="3096959"/>
+                  </a:lnTo>
+                  <a:lnTo>
+                    <a:pt x="5228444" y="3086503"/>
+                  </a:lnTo>
+                  <a:lnTo>
+                    <a:pt x="5156821" y="3075764"/>
+                  </a:lnTo>
+                  <a:lnTo>
+                    <a:pt x="5085199" y="3064734"/>
+                  </a:lnTo>
+                  <a:lnTo>
+                    <a:pt x="5013576" y="3053406"/>
+                  </a:lnTo>
+                  <a:lnTo>
+                    <a:pt x="4941954" y="3041773"/>
+                  </a:lnTo>
+                  <a:lnTo>
+                    <a:pt x="4870331" y="3029824"/>
+                  </a:lnTo>
+                  <a:lnTo>
+                    <a:pt x="4798709" y="3017553"/>
+                  </a:lnTo>
+                  <a:lnTo>
+                    <a:pt x="4727086" y="3004949"/>
+                  </a:lnTo>
+                  <a:lnTo>
+                    <a:pt x="4655464" y="2992005"/>
+                  </a:lnTo>
+                  <a:lnTo>
+                    <a:pt x="4583841" y="2978712"/>
+                  </a:lnTo>
+                  <a:lnTo>
+                    <a:pt x="4512219" y="2965058"/>
+                  </a:lnTo>
+                  <a:lnTo>
+                    <a:pt x="4440596" y="2951036"/>
+                  </a:lnTo>
+                  <a:lnTo>
+                    <a:pt x="4368974" y="2936635"/>
+                  </a:lnTo>
+                  <a:lnTo>
+                    <a:pt x="4297351" y="2921844"/>
+                  </a:lnTo>
+                  <a:lnTo>
+                    <a:pt x="4225729" y="2906653"/>
+                  </a:lnTo>
+                  <a:lnTo>
+                    <a:pt x="4154106" y="2891052"/>
+                  </a:lnTo>
+                  <a:lnTo>
+                    <a:pt x="4082483" y="2875029"/>
+                  </a:lnTo>
+                  <a:lnTo>
+                    <a:pt x="4010861" y="2858572"/>
+                  </a:lnTo>
+                  <a:lnTo>
+                    <a:pt x="3939238" y="2841671"/>
+                  </a:lnTo>
+                  <a:lnTo>
+                    <a:pt x="3867616" y="2824313"/>
+                  </a:lnTo>
+                  <a:lnTo>
+                    <a:pt x="3795993" y="2806486"/>
+                  </a:lnTo>
+                  <a:lnTo>
+                    <a:pt x="3724371" y="2788177"/>
+                  </a:lnTo>
+                  <a:lnTo>
+                    <a:pt x="3652748" y="2769373"/>
+                  </a:lnTo>
+                  <a:lnTo>
+                    <a:pt x="3581126" y="2750060"/>
+                  </a:lnTo>
+                  <a:lnTo>
+                    <a:pt x="3509503" y="2730225"/>
+                  </a:lnTo>
+                  <a:lnTo>
+                    <a:pt x="3437881" y="2709854"/>
+                  </a:lnTo>
+                  <a:lnTo>
+                    <a:pt x="3366258" y="2688933"/>
+                  </a:lnTo>
+                  <a:lnTo>
+                    <a:pt x="3294636" y="2667446"/>
+                  </a:lnTo>
+                  <a:lnTo>
+                    <a:pt x="3223013" y="2674472"/>
+                  </a:lnTo>
+                  <a:lnTo>
+                    <a:pt x="3151391" y="2722780"/>
+                  </a:lnTo>
+                  <a:lnTo>
+                    <a:pt x="3079768" y="2768205"/>
+                  </a:lnTo>
+                  <a:lnTo>
+                    <a:pt x="3008146" y="2810918"/>
+                  </a:lnTo>
+                  <a:lnTo>
+                    <a:pt x="2936523" y="2851082"/>
+                  </a:lnTo>
+                  <a:lnTo>
+                    <a:pt x="2864901" y="2888848"/>
+                  </a:lnTo>
+                  <a:lnTo>
+                    <a:pt x="2793278" y="2924359"/>
+                  </a:lnTo>
+                  <a:lnTo>
+                    <a:pt x="2721655" y="2957751"/>
+                  </a:lnTo>
+                  <a:lnTo>
+                    <a:pt x="2650033" y="2989150"/>
+                  </a:lnTo>
+                  <a:lnTo>
+                    <a:pt x="2578410" y="3018674"/>
+                  </a:lnTo>
+                  <a:lnTo>
+                    <a:pt x="2506788" y="3046436"/>
+                  </a:lnTo>
+                  <a:lnTo>
+                    <a:pt x="2435165" y="3072541"/>
+                  </a:lnTo>
+                  <a:lnTo>
+                    <a:pt x="2363543" y="3097087"/>
+                  </a:lnTo>
+                  <a:lnTo>
+                    <a:pt x="2291920" y="3120168"/>
+                  </a:lnTo>
+                  <a:lnTo>
+                    <a:pt x="2220298" y="3141871"/>
+                  </a:lnTo>
+                  <a:lnTo>
+                    <a:pt x="2148675" y="3162279"/>
+                  </a:lnTo>
+                  <a:lnTo>
+                    <a:pt x="2077053" y="3181469"/>
+                  </a:lnTo>
+                  <a:lnTo>
+                    <a:pt x="2005430" y="3199513"/>
+                  </a:lnTo>
+                  <a:lnTo>
+                    <a:pt x="1933808" y="3216480"/>
+                  </a:lnTo>
+                  <a:lnTo>
+                    <a:pt x="1862185" y="3232434"/>
+                  </a:lnTo>
+                  <a:lnTo>
+                    <a:pt x="1790563" y="3247436"/>
+                  </a:lnTo>
+                  <a:lnTo>
+                    <a:pt x="1718940" y="3261542"/>
+                  </a:lnTo>
+                  <a:lnTo>
+                    <a:pt x="1647318" y="3274806"/>
+                  </a:lnTo>
+                  <a:lnTo>
+                    <a:pt x="1575695" y="3287278"/>
+                  </a:lnTo>
+                  <a:lnTo>
+                    <a:pt x="1504073" y="3299006"/>
+                  </a:lnTo>
+                  <a:lnTo>
+                    <a:pt x="1432450" y="3310034"/>
+                  </a:lnTo>
+                  <a:lnTo>
+                    <a:pt x="1360827" y="3320404"/>
+                  </a:lnTo>
+                  <a:lnTo>
+                    <a:pt x="1289205" y="3330154"/>
+                  </a:lnTo>
+                  <a:lnTo>
+                    <a:pt x="1217582" y="3339323"/>
+                  </a:lnTo>
+                  <a:lnTo>
+                    <a:pt x="1145960" y="3347944"/>
+                  </a:lnTo>
+                  <a:lnTo>
+                    <a:pt x="1074337" y="3356050"/>
+                  </a:lnTo>
+                  <a:lnTo>
+                    <a:pt x="1002715" y="3363673"/>
+                  </a:lnTo>
+                  <a:lnTo>
+                    <a:pt x="931092" y="3370841"/>
+                  </a:lnTo>
+                  <a:lnTo>
+                    <a:pt x="859470" y="3377580"/>
+                  </a:lnTo>
+                  <a:lnTo>
+                    <a:pt x="787847" y="3383918"/>
+                  </a:lnTo>
+                  <a:lnTo>
+                    <a:pt x="716225" y="3389877"/>
+                  </a:lnTo>
+                  <a:lnTo>
+                    <a:pt x="644602" y="3395480"/>
+                  </a:lnTo>
+                  <a:lnTo>
+                    <a:pt x="572980" y="3400749"/>
+                  </a:lnTo>
+                  <a:lnTo>
+                    <a:pt x="501357" y="3405704"/>
+                  </a:lnTo>
+                  <a:lnTo>
+                    <a:pt x="429735" y="3410362"/>
+                  </a:lnTo>
+                  <a:lnTo>
+                    <a:pt x="358112" y="3414743"/>
+                  </a:lnTo>
+                  <a:lnTo>
+                    <a:pt x="286490" y="3418862"/>
+                  </a:lnTo>
+                  <a:lnTo>
+                    <a:pt x="214867" y="3422735"/>
+                  </a:lnTo>
+                  <a:lnTo>
+                    <a:pt x="143245" y="3426377"/>
+                  </a:lnTo>
+                  <a:lnTo>
+                    <a:pt x="71622" y="3429802"/>
+                  </a:lnTo>
+                  <a:lnTo>
+                    <a:pt x="0" y="3433022"/>
                   </a:lnTo>
                   <a:close/>
                 </a:path>
@@ -4020,221 +4020,221 @@
           <p:spPr>
             <a:xfrm>
               <a:off x="1172049" y="2073503"/>
-              <a:ext cx="4902442" cy="2652162"/>
+              <a:ext cx="4921182" cy="2645377"/>
             </a:xfrm>
             <a:custGeom>
               <a:avLst/>
               <a:pathLst>
-                <a:path w="4902442" h="2652162">
+                <a:path w="4921182" h="2645377">
                   <a:moveTo>
-                    <a:pt x="0" y="727964"/>
+                    <a:pt x="0" y="699180"/>
                   </a:moveTo>
                   <a:lnTo>
-                    <a:pt x="71622" y="800368"/>
-                  </a:lnTo>
-                  <a:lnTo>
-                    <a:pt x="143245" y="870871"/>
-                  </a:lnTo>
-                  <a:lnTo>
-                    <a:pt x="214867" y="939520"/>
-                  </a:lnTo>
-                  <a:lnTo>
-                    <a:pt x="286490" y="1006366"/>
-                  </a:lnTo>
-                  <a:lnTo>
-                    <a:pt x="358112" y="1071456"/>
-                  </a:lnTo>
-                  <a:lnTo>
-                    <a:pt x="429735" y="1134836"/>
-                  </a:lnTo>
-                  <a:lnTo>
-                    <a:pt x="501357" y="1196550"/>
-                  </a:lnTo>
-                  <a:lnTo>
-                    <a:pt x="572980" y="1256643"/>
-                  </a:lnTo>
-                  <a:lnTo>
-                    <a:pt x="644602" y="1315158"/>
-                  </a:lnTo>
-                  <a:lnTo>
-                    <a:pt x="716225" y="1372134"/>
-                  </a:lnTo>
-                  <a:lnTo>
-                    <a:pt x="787847" y="1427614"/>
-                  </a:lnTo>
-                  <a:lnTo>
-                    <a:pt x="859470" y="1481636"/>
-                  </a:lnTo>
-                  <a:lnTo>
-                    <a:pt x="931092" y="1534239"/>
-                  </a:lnTo>
-                  <a:lnTo>
-                    <a:pt x="1002715" y="1585460"/>
-                  </a:lnTo>
-                  <a:lnTo>
-                    <a:pt x="1074337" y="1635334"/>
-                  </a:lnTo>
-                  <a:lnTo>
-                    <a:pt x="1145960" y="1683899"/>
-                  </a:lnTo>
-                  <a:lnTo>
-                    <a:pt x="1217582" y="1731188"/>
-                  </a:lnTo>
-                  <a:lnTo>
-                    <a:pt x="1289205" y="1777234"/>
-                  </a:lnTo>
-                  <a:lnTo>
-                    <a:pt x="1360827" y="1822070"/>
-                  </a:lnTo>
-                  <a:lnTo>
-                    <a:pt x="1432450" y="1865728"/>
-                  </a:lnTo>
-                  <a:lnTo>
-                    <a:pt x="1504073" y="1908240"/>
-                  </a:lnTo>
-                  <a:lnTo>
-                    <a:pt x="1575695" y="1949634"/>
-                  </a:lnTo>
-                  <a:lnTo>
-                    <a:pt x="1647318" y="1989941"/>
-                  </a:lnTo>
-                  <a:lnTo>
-                    <a:pt x="1718940" y="2029188"/>
-                  </a:lnTo>
-                  <a:lnTo>
-                    <a:pt x="1790563" y="2067405"/>
-                  </a:lnTo>
-                  <a:lnTo>
-                    <a:pt x="1862185" y="2104617"/>
-                  </a:lnTo>
-                  <a:lnTo>
-                    <a:pt x="1933808" y="2140852"/>
-                  </a:lnTo>
-                  <a:lnTo>
-                    <a:pt x="2005430" y="2176135"/>
-                  </a:lnTo>
-                  <a:lnTo>
-                    <a:pt x="2077053" y="2210491"/>
-                  </a:lnTo>
-                  <a:lnTo>
-                    <a:pt x="2148675" y="2243944"/>
-                  </a:lnTo>
-                  <a:lnTo>
-                    <a:pt x="2220298" y="2276518"/>
-                  </a:lnTo>
-                  <a:lnTo>
-                    <a:pt x="2291920" y="2308236"/>
-                  </a:lnTo>
-                  <a:lnTo>
-                    <a:pt x="2363543" y="2339121"/>
-                  </a:lnTo>
-                  <a:lnTo>
-                    <a:pt x="2435165" y="2369195"/>
-                  </a:lnTo>
-                  <a:lnTo>
-                    <a:pt x="2506788" y="2398478"/>
-                  </a:lnTo>
-                  <a:lnTo>
-                    <a:pt x="2578410" y="2426992"/>
-                  </a:lnTo>
-                  <a:lnTo>
-                    <a:pt x="2650033" y="2454757"/>
-                  </a:lnTo>
-                  <a:lnTo>
-                    <a:pt x="2721655" y="2481792"/>
-                  </a:lnTo>
-                  <a:lnTo>
-                    <a:pt x="2793278" y="2508117"/>
-                  </a:lnTo>
-                  <a:lnTo>
-                    <a:pt x="2864901" y="2533750"/>
-                  </a:lnTo>
-                  <a:lnTo>
-                    <a:pt x="2936523" y="2558710"/>
-                  </a:lnTo>
-                  <a:lnTo>
-                    <a:pt x="3008146" y="2583014"/>
-                  </a:lnTo>
-                  <a:lnTo>
-                    <a:pt x="3079768" y="2606680"/>
-                  </a:lnTo>
-                  <a:lnTo>
-                    <a:pt x="3151391" y="2629724"/>
-                  </a:lnTo>
-                  <a:lnTo>
-                    <a:pt x="3223013" y="2652162"/>
-                  </a:lnTo>
-                  <a:lnTo>
-                    <a:pt x="3294636" y="2606910"/>
-                  </a:lnTo>
-                  <a:lnTo>
-                    <a:pt x="3366258" y="2551355"/>
-                  </a:lnTo>
-                  <a:lnTo>
-                    <a:pt x="3437881" y="2492279"/>
-                  </a:lnTo>
-                  <a:lnTo>
-                    <a:pt x="3509503" y="2429460"/>
-                  </a:lnTo>
-                  <a:lnTo>
-                    <a:pt x="3581126" y="2362660"/>
-                  </a:lnTo>
-                  <a:lnTo>
-                    <a:pt x="3652748" y="2291629"/>
-                  </a:lnTo>
-                  <a:lnTo>
-                    <a:pt x="3724371" y="2216097"/>
-                  </a:lnTo>
-                  <a:lnTo>
-                    <a:pt x="3795993" y="2135779"/>
-                  </a:lnTo>
-                  <a:lnTo>
-                    <a:pt x="3867616" y="2050372"/>
-                  </a:lnTo>
-                  <a:lnTo>
-                    <a:pt x="3939238" y="1959554"/>
-                  </a:lnTo>
-                  <a:lnTo>
-                    <a:pt x="4010861" y="1862982"/>
-                  </a:lnTo>
-                  <a:lnTo>
-                    <a:pt x="4082483" y="1760291"/>
-                  </a:lnTo>
-                  <a:lnTo>
-                    <a:pt x="4154106" y="1651094"/>
-                  </a:lnTo>
-                  <a:lnTo>
-                    <a:pt x="4225729" y="1534977"/>
-                  </a:lnTo>
-                  <a:lnTo>
-                    <a:pt x="4297351" y="1411504"/>
-                  </a:lnTo>
-                  <a:lnTo>
-                    <a:pt x="4368974" y="1280208"/>
-                  </a:lnTo>
-                  <a:lnTo>
-                    <a:pt x="4440596" y="1140593"/>
-                  </a:lnTo>
-                  <a:lnTo>
-                    <a:pt x="4512219" y="992131"/>
-                  </a:lnTo>
-                  <a:lnTo>
-                    <a:pt x="4583841" y="834264"/>
-                  </a:lnTo>
-                  <a:lnTo>
-                    <a:pt x="4655464" y="666393"/>
-                  </a:lnTo>
-                  <a:lnTo>
-                    <a:pt x="4727086" y="487887"/>
-                  </a:lnTo>
-                  <a:lnTo>
-                    <a:pt x="4798709" y="298071"/>
-                  </a:lnTo>
-                  <a:lnTo>
-                    <a:pt x="4870331" y="96227"/>
-                  </a:lnTo>
-                  <a:lnTo>
-                    <a:pt x="4902442" y="0"/>
+                    <a:pt x="71622" y="772478"/>
+                  </a:lnTo>
+                  <a:lnTo>
+                    <a:pt x="143245" y="843845"/>
+                  </a:lnTo>
+                  <a:lnTo>
+                    <a:pt x="214867" y="913335"/>
+                  </a:lnTo>
+                  <a:lnTo>
+                    <a:pt x="286490" y="980995"/>
+                  </a:lnTo>
+                  <a:lnTo>
+                    <a:pt x="358112" y="1046874"/>
+                  </a:lnTo>
+                  <a:lnTo>
+                    <a:pt x="429735" y="1111019"/>
+                  </a:lnTo>
+                  <a:lnTo>
+                    <a:pt x="501357" y="1173475"/>
+                  </a:lnTo>
+                  <a:lnTo>
+                    <a:pt x="572980" y="1234288"/>
+                  </a:lnTo>
+                  <a:lnTo>
+                    <a:pt x="644602" y="1293500"/>
+                  </a:lnTo>
+                  <a:lnTo>
+                    <a:pt x="716225" y="1351153"/>
+                  </a:lnTo>
+                  <a:lnTo>
+                    <a:pt x="787847" y="1407288"/>
+                  </a:lnTo>
+                  <a:lnTo>
+                    <a:pt x="859470" y="1461946"/>
+                  </a:lnTo>
+                  <a:lnTo>
+                    <a:pt x="931092" y="1515165"/>
+                  </a:lnTo>
+                  <a:lnTo>
+                    <a:pt x="1002715" y="1566984"/>
+                  </a:lnTo>
+                  <a:lnTo>
+                    <a:pt x="1074337" y="1617438"/>
+                  </a:lnTo>
+                  <a:lnTo>
+                    <a:pt x="1145960" y="1666564"/>
+                  </a:lnTo>
+                  <a:lnTo>
+                    <a:pt x="1217582" y="1714397"/>
+                  </a:lnTo>
+                  <a:lnTo>
+                    <a:pt x="1289205" y="1760971"/>
+                  </a:lnTo>
+                  <a:lnTo>
+                    <a:pt x="1360827" y="1806319"/>
+                  </a:lnTo>
+                  <a:lnTo>
+                    <a:pt x="1432450" y="1850474"/>
+                  </a:lnTo>
+                  <a:lnTo>
+                    <a:pt x="1504073" y="1893466"/>
+                  </a:lnTo>
+                  <a:lnTo>
+                    <a:pt x="1575695" y="1935326"/>
+                  </a:lnTo>
+                  <a:lnTo>
+                    <a:pt x="1647318" y="1976085"/>
+                  </a:lnTo>
+                  <a:lnTo>
+                    <a:pt x="1718940" y="2015770"/>
+                  </a:lnTo>
+                  <a:lnTo>
+                    <a:pt x="1790563" y="2054411"/>
+                  </a:lnTo>
+                  <a:lnTo>
+                    <a:pt x="1862185" y="2092035"/>
+                  </a:lnTo>
+                  <a:lnTo>
+                    <a:pt x="1933808" y="2128669"/>
+                  </a:lnTo>
+                  <a:lnTo>
+                    <a:pt x="2005430" y="2164338"/>
+                  </a:lnTo>
+                  <a:lnTo>
+                    <a:pt x="2077053" y="2199069"/>
+                  </a:lnTo>
+                  <a:lnTo>
+                    <a:pt x="2148675" y="2232885"/>
+                  </a:lnTo>
+                  <a:lnTo>
+                    <a:pt x="2220298" y="2265811"/>
+                  </a:lnTo>
+                  <a:lnTo>
+                    <a:pt x="2291920" y="2297870"/>
+                  </a:lnTo>
+                  <a:lnTo>
+                    <a:pt x="2363543" y="2329085"/>
+                  </a:lnTo>
+                  <a:lnTo>
+                    <a:pt x="2435165" y="2359479"/>
+                  </a:lnTo>
+                  <a:lnTo>
+                    <a:pt x="2506788" y="2389073"/>
+                  </a:lnTo>
+                  <a:lnTo>
+                    <a:pt x="2578410" y="2417888"/>
+                  </a:lnTo>
+                  <a:lnTo>
+                    <a:pt x="2650033" y="2445944"/>
+                  </a:lnTo>
+                  <a:lnTo>
+                    <a:pt x="2721655" y="2473262"/>
+                  </a:lnTo>
+                  <a:lnTo>
+                    <a:pt x="2793278" y="2499860"/>
+                  </a:lnTo>
+                  <a:lnTo>
+                    <a:pt x="2864901" y="2525759"/>
+                  </a:lnTo>
+                  <a:lnTo>
+                    <a:pt x="2936523" y="2550976"/>
+                  </a:lnTo>
+                  <a:lnTo>
+                    <a:pt x="3008146" y="2575529"/>
+                  </a:lnTo>
+                  <a:lnTo>
+                    <a:pt x="3079768" y="2599435"/>
+                  </a:lnTo>
+                  <a:lnTo>
+                    <a:pt x="3151391" y="2622713"/>
+                  </a:lnTo>
+                  <a:lnTo>
+                    <a:pt x="3223013" y="2645377"/>
+                  </a:lnTo>
+                  <a:lnTo>
+                    <a:pt x="3294636" y="2623096"/>
+                  </a:lnTo>
+                  <a:lnTo>
+                    <a:pt x="3366258" y="2568459"/>
+                  </a:lnTo>
+                  <a:lnTo>
+                    <a:pt x="3437881" y="2510354"/>
+                  </a:lnTo>
+                  <a:lnTo>
+                    <a:pt x="3509503" y="2448560"/>
+                  </a:lnTo>
+                  <a:lnTo>
+                    <a:pt x="3581126" y="2382843"/>
+                  </a:lnTo>
+                  <a:lnTo>
+                    <a:pt x="3652748" y="2312954"/>
+                  </a:lnTo>
+                  <a:lnTo>
+                    <a:pt x="3724371" y="2238629"/>
+                  </a:lnTo>
+                  <a:lnTo>
+                    <a:pt x="3795993" y="2159585"/>
+                  </a:lnTo>
+                  <a:lnTo>
+                    <a:pt x="3867616" y="2075523"/>
+                  </a:lnTo>
+                  <a:lnTo>
+                    <a:pt x="3939238" y="1986124"/>
+                  </a:lnTo>
+                  <a:lnTo>
+                    <a:pt x="4010861" y="1891051"/>
+                  </a:lnTo>
+                  <a:lnTo>
+                    <a:pt x="4082483" y="1789941"/>
+                  </a:lnTo>
+                  <a:lnTo>
+                    <a:pt x="4154106" y="1682413"/>
+                  </a:lnTo>
+                  <a:lnTo>
+                    <a:pt x="4225729" y="1568059"/>
+                  </a:lnTo>
+                  <a:lnTo>
+                    <a:pt x="4297351" y="1446445"/>
+                  </a:lnTo>
+                  <a:lnTo>
+                    <a:pt x="4368974" y="1317110"/>
+                  </a:lnTo>
+                  <a:lnTo>
+                    <a:pt x="4440596" y="1179566"/>
+                  </a:lnTo>
+                  <a:lnTo>
+                    <a:pt x="4512219" y="1033289"/>
+                  </a:lnTo>
+                  <a:lnTo>
+                    <a:pt x="4583841" y="877726"/>
+                  </a:lnTo>
+                  <a:lnTo>
+                    <a:pt x="4655464" y="712288"/>
+                  </a:lnTo>
+                  <a:lnTo>
+                    <a:pt x="4727086" y="536347"/>
+                  </a:lnTo>
+                  <a:lnTo>
+                    <a:pt x="4798709" y="349236"/>
+                  </a:lnTo>
+                  <a:lnTo>
+                    <a:pt x="4870331" y="150248"/>
+                  </a:lnTo>
+                  <a:lnTo>
+                    <a:pt x="4921182" y="0"/>
                   </a:lnTo>
                 </a:path>
               </a:pathLst>
@@ -4254,312 +4254,312 @@
           </p:nvSpPr>
           <p:spPr>
             <a:xfrm>
-              <a:off x="1172049" y="4732659"/>
-              <a:ext cx="7090630" cy="772634"/>
+              <a:off x="1172049" y="4740949"/>
+              <a:ext cx="7090630" cy="765576"/>
             </a:xfrm>
             <a:custGeom>
               <a:avLst/>
               <a:pathLst>
-                <a:path w="7090630" h="772634">
+                <a:path w="7090630" h="765576">
                   <a:moveTo>
-                    <a:pt x="7090630" y="627120"/>
+                    <a:pt x="7090630" y="617760"/>
                   </a:moveTo>
                   <a:lnTo>
-                    <a:pt x="7019007" y="621792"/>
-                  </a:lnTo>
-                  <a:lnTo>
-                    <a:pt x="6947385" y="616320"/>
-                  </a:lnTo>
-                  <a:lnTo>
-                    <a:pt x="6875762" y="610700"/>
-                  </a:lnTo>
-                  <a:lnTo>
-                    <a:pt x="6804139" y="604929"/>
-                  </a:lnTo>
-                  <a:lnTo>
-                    <a:pt x="6732517" y="599002"/>
-                  </a:lnTo>
-                  <a:lnTo>
-                    <a:pt x="6660894" y="592915"/>
-                  </a:lnTo>
-                  <a:lnTo>
-                    <a:pt x="6589272" y="586664"/>
-                  </a:lnTo>
-                  <a:lnTo>
-                    <a:pt x="6517649" y="580244"/>
-                  </a:lnTo>
-                  <a:lnTo>
-                    <a:pt x="6446027" y="573651"/>
-                  </a:lnTo>
-                  <a:lnTo>
-                    <a:pt x="6374404" y="566880"/>
-                  </a:lnTo>
-                  <a:lnTo>
-                    <a:pt x="6302782" y="559926"/>
-                  </a:lnTo>
-                  <a:lnTo>
-                    <a:pt x="6231159" y="552785"/>
-                  </a:lnTo>
-                  <a:lnTo>
-                    <a:pt x="6159537" y="545451"/>
-                  </a:lnTo>
-                  <a:lnTo>
-                    <a:pt x="6087914" y="537919"/>
-                  </a:lnTo>
-                  <a:lnTo>
-                    <a:pt x="6016292" y="530184"/>
-                  </a:lnTo>
-                  <a:lnTo>
-                    <a:pt x="5944669" y="522240"/>
-                  </a:lnTo>
-                  <a:lnTo>
-                    <a:pt x="5873047" y="514082"/>
-                  </a:lnTo>
-                  <a:lnTo>
-                    <a:pt x="5801424" y="505704"/>
-                  </a:lnTo>
-                  <a:lnTo>
-                    <a:pt x="5729802" y="497099"/>
-                  </a:lnTo>
-                  <a:lnTo>
-                    <a:pt x="5658179" y="488263"/>
-                  </a:lnTo>
-                  <a:lnTo>
-                    <a:pt x="5586557" y="479188"/>
-                  </a:lnTo>
-                  <a:lnTo>
-                    <a:pt x="5514934" y="469868"/>
-                  </a:lnTo>
-                  <a:lnTo>
-                    <a:pt x="5443311" y="460297"/>
-                  </a:lnTo>
-                  <a:lnTo>
-                    <a:pt x="5371689" y="450467"/>
-                  </a:lnTo>
-                  <a:lnTo>
-                    <a:pt x="5300066" y="440372"/>
-                  </a:lnTo>
-                  <a:lnTo>
-                    <a:pt x="5228444" y="430005"/>
-                  </a:lnTo>
-                  <a:lnTo>
-                    <a:pt x="5156821" y="419358"/>
-                  </a:lnTo>
-                  <a:lnTo>
-                    <a:pt x="5085199" y="408424"/>
-                  </a:lnTo>
-                  <a:lnTo>
-                    <a:pt x="5013576" y="397195"/>
-                  </a:lnTo>
-                  <a:lnTo>
-                    <a:pt x="4941954" y="385662"/>
-                  </a:lnTo>
-                  <a:lnTo>
-                    <a:pt x="4870331" y="373819"/>
-                  </a:lnTo>
-                  <a:lnTo>
-                    <a:pt x="4798709" y="361656"/>
-                  </a:lnTo>
-                  <a:lnTo>
-                    <a:pt x="4727086" y="349165"/>
-                  </a:lnTo>
-                  <a:lnTo>
-                    <a:pt x="4655464" y="336337"/>
-                  </a:lnTo>
-                  <a:lnTo>
-                    <a:pt x="4583841" y="323162"/>
-                  </a:lnTo>
-                  <a:lnTo>
-                    <a:pt x="4512219" y="309633"/>
-                  </a:lnTo>
-                  <a:lnTo>
-                    <a:pt x="4440596" y="295738"/>
-                  </a:lnTo>
-                  <a:lnTo>
-                    <a:pt x="4368974" y="281468"/>
-                  </a:lnTo>
-                  <a:lnTo>
-                    <a:pt x="4297351" y="266813"/>
-                  </a:lnTo>
-                  <a:lnTo>
-                    <a:pt x="4225729" y="251763"/>
-                  </a:lnTo>
-                  <a:lnTo>
-                    <a:pt x="4154106" y="236307"/>
-                  </a:lnTo>
-                  <a:lnTo>
-                    <a:pt x="4082483" y="220433"/>
-                  </a:lnTo>
-                  <a:lnTo>
-                    <a:pt x="4010861" y="204131"/>
-                  </a:lnTo>
-                  <a:lnTo>
-                    <a:pt x="3939238" y="187390"/>
-                  </a:lnTo>
-                  <a:lnTo>
-                    <a:pt x="3867616" y="170197"/>
-                  </a:lnTo>
-                  <a:lnTo>
-                    <a:pt x="3795993" y="152539"/>
-                  </a:lnTo>
-                  <a:lnTo>
-                    <a:pt x="3724371" y="134406"/>
-                  </a:lnTo>
-                  <a:lnTo>
-                    <a:pt x="3652748" y="115783"/>
-                  </a:lnTo>
-                  <a:lnTo>
-                    <a:pt x="3581126" y="96657"/>
-                  </a:lnTo>
-                  <a:lnTo>
-                    <a:pt x="3509503" y="77016"/>
-                  </a:lnTo>
-                  <a:lnTo>
-                    <a:pt x="3437881" y="56844"/>
-                  </a:lnTo>
-                  <a:lnTo>
-                    <a:pt x="3366258" y="36129"/>
-                  </a:lnTo>
-                  <a:lnTo>
-                    <a:pt x="3294636" y="14854"/>
-                  </a:lnTo>
-                  <a:lnTo>
-                    <a:pt x="3223013" y="0"/>
-                  </a:lnTo>
-                  <a:lnTo>
-                    <a:pt x="3151391" y="49132"/>
-                  </a:lnTo>
-                  <a:lnTo>
-                    <a:pt x="3079768" y="95337"/>
-                  </a:lnTo>
-                  <a:lnTo>
-                    <a:pt x="3008146" y="138789"/>
-                  </a:lnTo>
-                  <a:lnTo>
-                    <a:pt x="2936523" y="179652"/>
-                  </a:lnTo>
-                  <a:lnTo>
-                    <a:pt x="2864901" y="218081"/>
-                  </a:lnTo>
-                  <a:lnTo>
-                    <a:pt x="2793278" y="254219"/>
-                  </a:lnTo>
-                  <a:lnTo>
-                    <a:pt x="2721655" y="288204"/>
-                  </a:lnTo>
-                  <a:lnTo>
-                    <a:pt x="2650033" y="320164"/>
-                  </a:lnTo>
-                  <a:lnTo>
-                    <a:pt x="2578410" y="350220"/>
-                  </a:lnTo>
-                  <a:lnTo>
-                    <a:pt x="2506788" y="378485"/>
-                  </a:lnTo>
-                  <a:lnTo>
-                    <a:pt x="2435165" y="405066"/>
-                  </a:lnTo>
-                  <a:lnTo>
-                    <a:pt x="2363543" y="430063"/>
-                  </a:lnTo>
-                  <a:lnTo>
-                    <a:pt x="2291920" y="453571"/>
-                  </a:lnTo>
-                  <a:lnTo>
-                    <a:pt x="2220298" y="475678"/>
-                  </a:lnTo>
-                  <a:lnTo>
-                    <a:pt x="2148675" y="496467"/>
-                  </a:lnTo>
-                  <a:lnTo>
-                    <a:pt x="2077053" y="516018"/>
-                  </a:lnTo>
-                  <a:lnTo>
-                    <a:pt x="2005430" y="534404"/>
-                  </a:lnTo>
-                  <a:lnTo>
-                    <a:pt x="1933808" y="551695"/>
-                  </a:lnTo>
-                  <a:lnTo>
-                    <a:pt x="1862185" y="567955"/>
-                  </a:lnTo>
-                  <a:lnTo>
-                    <a:pt x="1790563" y="583247"/>
-                  </a:lnTo>
-                  <a:lnTo>
-                    <a:pt x="1718940" y="597627"/>
-                  </a:lnTo>
-                  <a:lnTo>
-                    <a:pt x="1647318" y="611150"/>
-                  </a:lnTo>
-                  <a:lnTo>
-                    <a:pt x="1575695" y="623868"/>
-                  </a:lnTo>
-                  <a:lnTo>
-                    <a:pt x="1504073" y="635828"/>
-                  </a:lnTo>
-                  <a:lnTo>
-                    <a:pt x="1432450" y="647075"/>
-                  </a:lnTo>
-                  <a:lnTo>
-                    <a:pt x="1360827" y="657652"/>
-                  </a:lnTo>
-                  <a:lnTo>
-                    <a:pt x="1289205" y="667599"/>
-                  </a:lnTo>
-                  <a:lnTo>
-                    <a:pt x="1217582" y="676953"/>
-                  </a:lnTo>
-                  <a:lnTo>
-                    <a:pt x="1145960" y="685750"/>
-                  </a:lnTo>
-                  <a:lnTo>
-                    <a:pt x="1074337" y="694023"/>
-                  </a:lnTo>
-                  <a:lnTo>
-                    <a:pt x="1002715" y="701802"/>
-                  </a:lnTo>
-                  <a:lnTo>
-                    <a:pt x="931092" y="709119"/>
-                  </a:lnTo>
-                  <a:lnTo>
-                    <a:pt x="859470" y="715999"/>
-                  </a:lnTo>
-                  <a:lnTo>
-                    <a:pt x="787847" y="722469"/>
-                  </a:lnTo>
-                  <a:lnTo>
-                    <a:pt x="716225" y="728554"/>
-                  </a:lnTo>
-                  <a:lnTo>
-                    <a:pt x="644602" y="734276"/>
-                  </a:lnTo>
-                  <a:lnTo>
-                    <a:pt x="572980" y="739657"/>
-                  </a:lnTo>
-                  <a:lnTo>
-                    <a:pt x="501357" y="744718"/>
-                  </a:lnTo>
-                  <a:lnTo>
-                    <a:pt x="429735" y="749477"/>
-                  </a:lnTo>
-                  <a:lnTo>
-                    <a:pt x="358112" y="753953"/>
-                  </a:lnTo>
-                  <a:lnTo>
-                    <a:pt x="286490" y="758162"/>
-                  </a:lnTo>
-                  <a:lnTo>
-                    <a:pt x="214867" y="762120"/>
-                  </a:lnTo>
-                  <a:lnTo>
-                    <a:pt x="143245" y="765842"/>
-                  </a:lnTo>
-                  <a:lnTo>
-                    <a:pt x="71622" y="769342"/>
-                  </a:lnTo>
-                  <a:lnTo>
-                    <a:pt x="0" y="772634"/>
+                    <a:pt x="7019007" y="612393"/>
+                  </a:lnTo>
+                  <a:lnTo>
+                    <a:pt x="6947385" y="606880"/>
+                  </a:lnTo>
+                  <a:lnTo>
+                    <a:pt x="6875762" y="601219"/>
+                  </a:lnTo>
+                  <a:lnTo>
+                    <a:pt x="6804139" y="595404"/>
+                  </a:lnTo>
+                  <a:lnTo>
+                    <a:pt x="6732517" y="589432"/>
+                  </a:lnTo>
+                  <a:lnTo>
+                    <a:pt x="6660894" y="583299"/>
+                  </a:lnTo>
+                  <a:lnTo>
+                    <a:pt x="6589272" y="577000"/>
+                  </a:lnTo>
+                  <a:lnTo>
+                    <a:pt x="6517649" y="570531"/>
+                  </a:lnTo>
+                  <a:lnTo>
+                    <a:pt x="6446027" y="563887"/>
+                  </a:lnTo>
+                  <a:lnTo>
+                    <a:pt x="6374404" y="557063"/>
+                  </a:lnTo>
+                  <a:lnTo>
+                    <a:pt x="6302782" y="550055"/>
+                  </a:lnTo>
+                  <a:lnTo>
+                    <a:pt x="6231159" y="542857"/>
+                  </a:lnTo>
+                  <a:lnTo>
+                    <a:pt x="6159537" y="535464"/>
+                  </a:lnTo>
+                  <a:lnTo>
+                    <a:pt x="6087914" y="527872"/>
+                  </a:lnTo>
+                  <a:lnTo>
+                    <a:pt x="6016292" y="520075"/>
+                  </a:lnTo>
+                  <a:lnTo>
+                    <a:pt x="5944669" y="512067"/>
+                  </a:lnTo>
+                  <a:lnTo>
+                    <a:pt x="5873047" y="503842"/>
+                  </a:lnTo>
+                  <a:lnTo>
+                    <a:pt x="5801424" y="495395"/>
+                  </a:lnTo>
+                  <a:lnTo>
+                    <a:pt x="5729802" y="486719"/>
+                  </a:lnTo>
+                  <a:lnTo>
+                    <a:pt x="5658179" y="477809"/>
+                  </a:lnTo>
+                  <a:lnTo>
+                    <a:pt x="5586557" y="468658"/>
+                  </a:lnTo>
+                  <a:lnTo>
+                    <a:pt x="5514934" y="459260"/>
+                  </a:lnTo>
+                  <a:lnTo>
+                    <a:pt x="5443311" y="449608"/>
+                  </a:lnTo>
+                  <a:lnTo>
+                    <a:pt x="5371689" y="439695"/>
+                  </a:lnTo>
+                  <a:lnTo>
+                    <a:pt x="5300066" y="429513"/>
+                  </a:lnTo>
+                  <a:lnTo>
+                    <a:pt x="5228444" y="419057"/>
+                  </a:lnTo>
+                  <a:lnTo>
+                    <a:pt x="5156821" y="408318"/>
+                  </a:lnTo>
+                  <a:lnTo>
+                    <a:pt x="5085199" y="397288"/>
+                  </a:lnTo>
+                  <a:lnTo>
+                    <a:pt x="5013576" y="385960"/>
+                  </a:lnTo>
+                  <a:lnTo>
+                    <a:pt x="4941954" y="374326"/>
+                  </a:lnTo>
+                  <a:lnTo>
+                    <a:pt x="4870331" y="362378"/>
+                  </a:lnTo>
+                  <a:lnTo>
+                    <a:pt x="4798709" y="350107"/>
+                  </a:lnTo>
+                  <a:lnTo>
+                    <a:pt x="4727086" y="337503"/>
+                  </a:lnTo>
+                  <a:lnTo>
+                    <a:pt x="4655464" y="324559"/>
+                  </a:lnTo>
+                  <a:lnTo>
+                    <a:pt x="4583841" y="311266"/>
+                  </a:lnTo>
+                  <a:lnTo>
+                    <a:pt x="4512219" y="297612"/>
+                  </a:lnTo>
+                  <a:lnTo>
+                    <a:pt x="4440596" y="283590"/>
+                  </a:lnTo>
+                  <a:lnTo>
+                    <a:pt x="4368974" y="269188"/>
+                  </a:lnTo>
+                  <a:lnTo>
+                    <a:pt x="4297351" y="254398"/>
+                  </a:lnTo>
+                  <a:lnTo>
+                    <a:pt x="4225729" y="239207"/>
+                  </a:lnTo>
+                  <a:lnTo>
+                    <a:pt x="4154106" y="223606"/>
+                  </a:lnTo>
+                  <a:lnTo>
+                    <a:pt x="4082483" y="207583"/>
+                  </a:lnTo>
+                  <a:lnTo>
+                    <a:pt x="4010861" y="191126"/>
+                  </a:lnTo>
+                  <a:lnTo>
+                    <a:pt x="3939238" y="174225"/>
+                  </a:lnTo>
+                  <a:lnTo>
+                    <a:pt x="3867616" y="156867"/>
+                  </a:lnTo>
+                  <a:lnTo>
+                    <a:pt x="3795993" y="139040"/>
+                  </a:lnTo>
+                  <a:lnTo>
+                    <a:pt x="3724371" y="120731"/>
+                  </a:lnTo>
+                  <a:lnTo>
+                    <a:pt x="3652748" y="101927"/>
+                  </a:lnTo>
+                  <a:lnTo>
+                    <a:pt x="3581126" y="82614"/>
+                  </a:lnTo>
+                  <a:lnTo>
+                    <a:pt x="3509503" y="62779"/>
+                  </a:lnTo>
+                  <a:lnTo>
+                    <a:pt x="3437881" y="42408"/>
+                  </a:lnTo>
+                  <a:lnTo>
+                    <a:pt x="3366258" y="21487"/>
+                  </a:lnTo>
+                  <a:lnTo>
+                    <a:pt x="3294636" y="0"/>
+                  </a:lnTo>
+                  <a:lnTo>
+                    <a:pt x="3223013" y="7026"/>
+                  </a:lnTo>
+                  <a:lnTo>
+                    <a:pt x="3151391" y="55334"/>
+                  </a:lnTo>
+                  <a:lnTo>
+                    <a:pt x="3079768" y="100759"/>
+                  </a:lnTo>
+                  <a:lnTo>
+                    <a:pt x="3008146" y="143472"/>
+                  </a:lnTo>
+                  <a:lnTo>
+                    <a:pt x="2936523" y="183636"/>
+                  </a:lnTo>
+                  <a:lnTo>
+                    <a:pt x="2864901" y="221402"/>
+                  </a:lnTo>
+                  <a:lnTo>
+                    <a:pt x="2793278" y="256913"/>
+                  </a:lnTo>
+                  <a:lnTo>
+                    <a:pt x="2721655" y="290305"/>
+                  </a:lnTo>
+                  <a:lnTo>
+                    <a:pt x="2650033" y="321704"/>
+                  </a:lnTo>
+                  <a:lnTo>
+                    <a:pt x="2578410" y="351228"/>
+                  </a:lnTo>
+                  <a:lnTo>
+                    <a:pt x="2506788" y="378990"/>
+                  </a:lnTo>
+                  <a:lnTo>
+                    <a:pt x="2435165" y="405095"/>
+                  </a:lnTo>
+                  <a:lnTo>
+                    <a:pt x="2363543" y="429641"/>
+                  </a:lnTo>
+                  <a:lnTo>
+                    <a:pt x="2291920" y="452722"/>
+                  </a:lnTo>
+                  <a:lnTo>
+                    <a:pt x="2220298" y="474425"/>
+                  </a:lnTo>
+                  <a:lnTo>
+                    <a:pt x="2148675" y="494833"/>
+                  </a:lnTo>
+                  <a:lnTo>
+                    <a:pt x="2077053" y="514023"/>
+                  </a:lnTo>
+                  <a:lnTo>
+                    <a:pt x="2005430" y="532067"/>
+                  </a:lnTo>
+                  <a:lnTo>
+                    <a:pt x="1933808" y="549034"/>
+                  </a:lnTo>
+                  <a:lnTo>
+                    <a:pt x="1862185" y="564988"/>
+                  </a:lnTo>
+                  <a:lnTo>
+                    <a:pt x="1790563" y="579990"/>
+                  </a:lnTo>
+                  <a:lnTo>
+                    <a:pt x="1718940" y="594096"/>
+                  </a:lnTo>
+                  <a:lnTo>
+                    <a:pt x="1647318" y="607360"/>
+                  </a:lnTo>
+                  <a:lnTo>
+                    <a:pt x="1575695" y="619832"/>
+                  </a:lnTo>
+                  <a:lnTo>
+                    <a:pt x="1504073" y="631560"/>
+                  </a:lnTo>
+                  <a:lnTo>
+                    <a:pt x="1432450" y="642588"/>
+                  </a:lnTo>
+                  <a:lnTo>
+                    <a:pt x="1360827" y="652958"/>
+                  </a:lnTo>
+                  <a:lnTo>
+                    <a:pt x="1289205" y="662708"/>
+                  </a:lnTo>
+                  <a:lnTo>
+                    <a:pt x="1217582" y="671877"/>
+                  </a:lnTo>
+                  <a:lnTo>
+                    <a:pt x="1145960" y="680498"/>
+                  </a:lnTo>
+                  <a:lnTo>
+                    <a:pt x="1074337" y="688604"/>
+                  </a:lnTo>
+                  <a:lnTo>
+                    <a:pt x="1002715" y="696227"/>
+                  </a:lnTo>
+                  <a:lnTo>
+                    <a:pt x="931092" y="703395"/>
+                  </a:lnTo>
+                  <a:lnTo>
+                    <a:pt x="859470" y="710134"/>
+                  </a:lnTo>
+                  <a:lnTo>
+                    <a:pt x="787847" y="716472"/>
+                  </a:lnTo>
+                  <a:lnTo>
+                    <a:pt x="716225" y="722431"/>
+                  </a:lnTo>
+                  <a:lnTo>
+                    <a:pt x="644602" y="728034"/>
+                  </a:lnTo>
+                  <a:lnTo>
+                    <a:pt x="572980" y="733303"/>
+                  </a:lnTo>
+                  <a:lnTo>
+                    <a:pt x="501357" y="738258"/>
+                  </a:lnTo>
+                  <a:lnTo>
+                    <a:pt x="429735" y="742916"/>
+                  </a:lnTo>
+                  <a:lnTo>
+                    <a:pt x="358112" y="747297"/>
+                  </a:lnTo>
+                  <a:lnTo>
+                    <a:pt x="286490" y="751416"/>
+                  </a:lnTo>
+                  <a:lnTo>
+                    <a:pt x="214867" y="755289"/>
+                  </a:lnTo>
+                  <a:lnTo>
+                    <a:pt x="143245" y="758931"/>
+                  </a:lnTo>
+                  <a:lnTo>
+                    <a:pt x="71622" y="762356"/>
+                  </a:lnTo>
+                  <a:lnTo>
+                    <a:pt x="0" y="765576"/>
                   </a:lnTo>
                 </a:path>
               </a:pathLst>
@@ -4579,309 +4579,309 @@
           </p:nvSpPr>
           <p:spPr>
             <a:xfrm>
-              <a:off x="1172049" y="3437750"/>
-              <a:ext cx="7090630" cy="1741111"/>
+              <a:off x="1172049" y="3445225"/>
+              <a:ext cx="7090630" cy="1736197"/>
             </a:xfrm>
             <a:custGeom>
               <a:avLst/>
               <a:pathLst>
-                <a:path w="7090630" h="1741111">
+                <a:path w="7090630" h="1736197">
                   <a:moveTo>
-                    <a:pt x="0" y="1741111"/>
+                    <a:pt x="0" y="1736197"/>
                   </a:moveTo>
                   <a:lnTo>
-                    <a:pt x="71622" y="1734468"/>
-                  </a:lnTo>
-                  <a:lnTo>
-                    <a:pt x="143245" y="1727708"/>
-                  </a:lnTo>
-                  <a:lnTo>
-                    <a:pt x="214867" y="1720829"/>
-                  </a:lnTo>
-                  <a:lnTo>
-                    <a:pt x="286490" y="1713830"/>
-                  </a:lnTo>
-                  <a:lnTo>
-                    <a:pt x="358112" y="1706708"/>
-                  </a:lnTo>
-                  <a:lnTo>
-                    <a:pt x="429735" y="1699461"/>
-                  </a:lnTo>
-                  <a:lnTo>
-                    <a:pt x="501357" y="1692086"/>
-                  </a:lnTo>
-                  <a:lnTo>
-                    <a:pt x="572980" y="1684582"/>
-                  </a:lnTo>
-                  <a:lnTo>
-                    <a:pt x="644602" y="1676947"/>
-                  </a:lnTo>
-                  <a:lnTo>
-                    <a:pt x="716225" y="1669177"/>
-                  </a:lnTo>
-                  <a:lnTo>
-                    <a:pt x="787847" y="1661271"/>
-                  </a:lnTo>
-                  <a:lnTo>
-                    <a:pt x="859470" y="1653226"/>
-                  </a:lnTo>
-                  <a:lnTo>
-                    <a:pt x="931092" y="1645040"/>
-                  </a:lnTo>
-                  <a:lnTo>
-                    <a:pt x="1002715" y="1636710"/>
-                  </a:lnTo>
-                  <a:lnTo>
-                    <a:pt x="1074337" y="1628234"/>
-                  </a:lnTo>
-                  <a:lnTo>
-                    <a:pt x="1145960" y="1619609"/>
-                  </a:lnTo>
-                  <a:lnTo>
-                    <a:pt x="1217582" y="1610833"/>
-                  </a:lnTo>
-                  <a:lnTo>
-                    <a:pt x="1289205" y="1601902"/>
-                  </a:lnTo>
-                  <a:lnTo>
-                    <a:pt x="1360827" y="1592815"/>
-                  </a:lnTo>
-                  <a:lnTo>
-                    <a:pt x="1432450" y="1583568"/>
-                  </a:lnTo>
-                  <a:lnTo>
-                    <a:pt x="1504073" y="1574159"/>
-                  </a:lnTo>
-                  <a:lnTo>
-                    <a:pt x="1575695" y="1564585"/>
-                  </a:lnTo>
-                  <a:lnTo>
-                    <a:pt x="1647318" y="1554843"/>
-                  </a:lnTo>
-                  <a:lnTo>
-                    <a:pt x="1718940" y="1544929"/>
-                  </a:lnTo>
-                  <a:lnTo>
-                    <a:pt x="1790563" y="1534842"/>
-                  </a:lnTo>
-                  <a:lnTo>
-                    <a:pt x="1862185" y="1524577"/>
-                  </a:lnTo>
-                  <a:lnTo>
-                    <a:pt x="1933808" y="1514133"/>
-                  </a:lnTo>
-                  <a:lnTo>
-                    <a:pt x="2005430" y="1503504"/>
-                  </a:lnTo>
-                  <a:lnTo>
-                    <a:pt x="2077053" y="1492690"/>
-                  </a:lnTo>
-                  <a:lnTo>
-                    <a:pt x="2148675" y="1481685"/>
-                  </a:lnTo>
-                  <a:lnTo>
-                    <a:pt x="2220298" y="1470487"/>
-                  </a:lnTo>
-                  <a:lnTo>
-                    <a:pt x="2291920" y="1459093"/>
-                  </a:lnTo>
-                  <a:lnTo>
-                    <a:pt x="2363543" y="1447498"/>
-                  </a:lnTo>
-                  <a:lnTo>
-                    <a:pt x="2435165" y="1435700"/>
-                  </a:lnTo>
-                  <a:lnTo>
-                    <a:pt x="2506788" y="1423695"/>
-                  </a:lnTo>
-                  <a:lnTo>
-                    <a:pt x="2578410" y="1411479"/>
-                  </a:lnTo>
-                  <a:lnTo>
-                    <a:pt x="2650033" y="1399049"/>
-                  </a:lnTo>
-                  <a:lnTo>
-                    <a:pt x="2721655" y="1386400"/>
-                  </a:lnTo>
-                  <a:lnTo>
-                    <a:pt x="2793278" y="1373530"/>
-                  </a:lnTo>
-                  <a:lnTo>
-                    <a:pt x="2864901" y="1360433"/>
-                  </a:lnTo>
-                  <a:lnTo>
-                    <a:pt x="2936523" y="1347107"/>
-                  </a:lnTo>
-                  <a:lnTo>
-                    <a:pt x="3008146" y="1333546"/>
-                  </a:lnTo>
-                  <a:lnTo>
-                    <a:pt x="3079768" y="1319748"/>
-                  </a:lnTo>
-                  <a:lnTo>
-                    <a:pt x="3151391" y="1305707"/>
-                  </a:lnTo>
-                  <a:lnTo>
-                    <a:pt x="3223013" y="1291419"/>
-                  </a:lnTo>
-                  <a:lnTo>
-                    <a:pt x="3294636" y="1276881"/>
-                  </a:lnTo>
-                  <a:lnTo>
-                    <a:pt x="3366258" y="1262088"/>
-                  </a:lnTo>
-                  <a:lnTo>
-                    <a:pt x="3437881" y="1247035"/>
-                  </a:lnTo>
-                  <a:lnTo>
-                    <a:pt x="3509503" y="1231717"/>
-                  </a:lnTo>
-                  <a:lnTo>
-                    <a:pt x="3581126" y="1216131"/>
-                  </a:lnTo>
-                  <a:lnTo>
-                    <a:pt x="3652748" y="1200271"/>
-                  </a:lnTo>
-                  <a:lnTo>
-                    <a:pt x="3724371" y="1184132"/>
-                  </a:lnTo>
-                  <a:lnTo>
-                    <a:pt x="3795993" y="1167710"/>
-                  </a:lnTo>
-                  <a:lnTo>
-                    <a:pt x="3867616" y="1151000"/>
-                  </a:lnTo>
-                  <a:lnTo>
-                    <a:pt x="3939238" y="1133997"/>
-                  </a:lnTo>
-                  <a:lnTo>
-                    <a:pt x="4010861" y="1116695"/>
-                  </a:lnTo>
-                  <a:lnTo>
-                    <a:pt x="4082483" y="1099089"/>
-                  </a:lnTo>
-                  <a:lnTo>
-                    <a:pt x="4154106" y="1081174"/>
-                  </a:lnTo>
-                  <a:lnTo>
-                    <a:pt x="4225729" y="1062945"/>
-                  </a:lnTo>
-                  <a:lnTo>
-                    <a:pt x="4297351" y="1044396"/>
-                  </a:lnTo>
-                  <a:lnTo>
-                    <a:pt x="4368974" y="1025521"/>
-                  </a:lnTo>
-                  <a:lnTo>
-                    <a:pt x="4440596" y="1006314"/>
-                  </a:lnTo>
-                  <a:lnTo>
-                    <a:pt x="4512219" y="986770"/>
-                  </a:lnTo>
-                  <a:lnTo>
-                    <a:pt x="4583841" y="966884"/>
-                  </a:lnTo>
-                  <a:lnTo>
-                    <a:pt x="4655464" y="946648"/>
-                  </a:lnTo>
-                  <a:lnTo>
-                    <a:pt x="4727086" y="926057"/>
-                  </a:lnTo>
-                  <a:lnTo>
-                    <a:pt x="4798709" y="905104"/>
-                  </a:lnTo>
-                  <a:lnTo>
-                    <a:pt x="4870331" y="883783"/>
-                  </a:lnTo>
-                  <a:lnTo>
-                    <a:pt x="4941954" y="862088"/>
-                  </a:lnTo>
-                  <a:lnTo>
-                    <a:pt x="5013576" y="840013"/>
-                  </a:lnTo>
-                  <a:lnTo>
-                    <a:pt x="5085199" y="817549"/>
-                  </a:lnTo>
-                  <a:lnTo>
-                    <a:pt x="5156821" y="794692"/>
-                  </a:lnTo>
-                  <a:lnTo>
-                    <a:pt x="5228444" y="771433"/>
-                  </a:lnTo>
-                  <a:lnTo>
-                    <a:pt x="5300066" y="747765"/>
-                  </a:lnTo>
-                  <a:lnTo>
-                    <a:pt x="5371689" y="723682"/>
-                  </a:lnTo>
-                  <a:lnTo>
-                    <a:pt x="5443311" y="699177"/>
-                  </a:lnTo>
-                  <a:lnTo>
-                    <a:pt x="5514934" y="674241"/>
-                  </a:lnTo>
-                  <a:lnTo>
-                    <a:pt x="5586557" y="648867"/>
-                  </a:lnTo>
-                  <a:lnTo>
-                    <a:pt x="5658179" y="623048"/>
-                  </a:lnTo>
-                  <a:lnTo>
-                    <a:pt x="5729802" y="596775"/>
-                  </a:lnTo>
-                  <a:lnTo>
-                    <a:pt x="5801424" y="570042"/>
-                  </a:lnTo>
-                  <a:lnTo>
-                    <a:pt x="5873047" y="542839"/>
-                  </a:lnTo>
-                  <a:lnTo>
-                    <a:pt x="5944669" y="515158"/>
-                  </a:lnTo>
-                  <a:lnTo>
-                    <a:pt x="6016292" y="486991"/>
-                  </a:lnTo>
-                  <a:lnTo>
-                    <a:pt x="6087914" y="458330"/>
-                  </a:lnTo>
-                  <a:lnTo>
-                    <a:pt x="6159537" y="429166"/>
-                  </a:lnTo>
-                  <a:lnTo>
-                    <a:pt x="6231159" y="399490"/>
-                  </a:lnTo>
-                  <a:lnTo>
-                    <a:pt x="6302782" y="369292"/>
-                  </a:lnTo>
-                  <a:lnTo>
-                    <a:pt x="6374404" y="338565"/>
-                  </a:lnTo>
-                  <a:lnTo>
-                    <a:pt x="6446027" y="307298"/>
-                  </a:lnTo>
-                  <a:lnTo>
-                    <a:pt x="6517649" y="275482"/>
-                  </a:lnTo>
-                  <a:lnTo>
-                    <a:pt x="6589272" y="243107"/>
-                  </a:lnTo>
-                  <a:lnTo>
-                    <a:pt x="6660894" y="210164"/>
-                  </a:lnTo>
-                  <a:lnTo>
-                    <a:pt x="6732517" y="176643"/>
-                  </a:lnTo>
-                  <a:lnTo>
-                    <a:pt x="6804139" y="142533"/>
-                  </a:lnTo>
-                  <a:lnTo>
-                    <a:pt x="6875762" y="107825"/>
-                  </a:lnTo>
-                  <a:lnTo>
-                    <a:pt x="6947385" y="72507"/>
-                  </a:lnTo>
-                  <a:lnTo>
-                    <a:pt x="7019007" y="36569"/>
+                    <a:pt x="71622" y="1729586"/>
+                  </a:lnTo>
+                  <a:lnTo>
+                    <a:pt x="143245" y="1722859"/>
+                  </a:lnTo>
+                  <a:lnTo>
+                    <a:pt x="214867" y="1716014"/>
+                  </a:lnTo>
+                  <a:lnTo>
+                    <a:pt x="286490" y="1709048"/>
+                  </a:lnTo>
+                  <a:lnTo>
+                    <a:pt x="358112" y="1701960"/>
+                  </a:lnTo>
+                  <a:lnTo>
+                    <a:pt x="429735" y="1694747"/>
+                  </a:lnTo>
+                  <a:lnTo>
+                    <a:pt x="501357" y="1687407"/>
+                  </a:lnTo>
+                  <a:lnTo>
+                    <a:pt x="572980" y="1679938"/>
+                  </a:lnTo>
+                  <a:lnTo>
+                    <a:pt x="644602" y="1672337"/>
+                  </a:lnTo>
+                  <a:lnTo>
+                    <a:pt x="716225" y="1664603"/>
+                  </a:lnTo>
+                  <a:lnTo>
+                    <a:pt x="787847" y="1656733"/>
+                  </a:lnTo>
+                  <a:lnTo>
+                    <a:pt x="859470" y="1648724"/>
+                  </a:lnTo>
+                  <a:lnTo>
+                    <a:pt x="931092" y="1640575"/>
+                  </a:lnTo>
+                  <a:lnTo>
+                    <a:pt x="1002715" y="1632282"/>
+                  </a:lnTo>
+                  <a:lnTo>
+                    <a:pt x="1074337" y="1623843"/>
+                  </a:lnTo>
+                  <a:lnTo>
+                    <a:pt x="1145960" y="1615256"/>
+                  </a:lnTo>
+                  <a:lnTo>
+                    <a:pt x="1217582" y="1606518"/>
+                  </a:lnTo>
+                  <a:lnTo>
+                    <a:pt x="1289205" y="1597626"/>
+                  </a:lnTo>
+                  <a:lnTo>
+                    <a:pt x="1360827" y="1588578"/>
+                  </a:lnTo>
+                  <a:lnTo>
+                    <a:pt x="1432450" y="1579371"/>
+                  </a:lnTo>
+                  <a:lnTo>
+                    <a:pt x="1504073" y="1570001"/>
+                  </a:lnTo>
+                  <a:lnTo>
+                    <a:pt x="1575695" y="1560467"/>
+                  </a:lnTo>
+                  <a:lnTo>
+                    <a:pt x="1647318" y="1550765"/>
+                  </a:lnTo>
+                  <a:lnTo>
+                    <a:pt x="1718940" y="1540893"/>
+                  </a:lnTo>
+                  <a:lnTo>
+                    <a:pt x="1790563" y="1530846"/>
+                  </a:lnTo>
+                  <a:lnTo>
+                    <a:pt x="1862185" y="1520623"/>
+                  </a:lnTo>
+                  <a:lnTo>
+                    <a:pt x="1933808" y="1510221"/>
+                  </a:lnTo>
+                  <a:lnTo>
+                    <a:pt x="2005430" y="1499635"/>
+                  </a:lnTo>
+                  <a:lnTo>
+                    <a:pt x="2077053" y="1488863"/>
+                  </a:lnTo>
+                  <a:lnTo>
+                    <a:pt x="2148675" y="1477902"/>
+                  </a:lnTo>
+                  <a:lnTo>
+                    <a:pt x="2220298" y="1466747"/>
+                  </a:lnTo>
+                  <a:lnTo>
+                    <a:pt x="2291920" y="1455397"/>
+                  </a:lnTo>
+                  <a:lnTo>
+                    <a:pt x="2363543" y="1443847"/>
+                  </a:lnTo>
+                  <a:lnTo>
+                    <a:pt x="2435165" y="1432094"/>
+                  </a:lnTo>
+                  <a:lnTo>
+                    <a:pt x="2506788" y="1420134"/>
+                  </a:lnTo>
+                  <a:lnTo>
+                    <a:pt x="2578410" y="1407963"/>
+                  </a:lnTo>
+                  <a:lnTo>
+                    <a:pt x="2650033" y="1395579"/>
+                  </a:lnTo>
+                  <a:lnTo>
+                    <a:pt x="2721655" y="1382977"/>
+                  </a:lnTo>
+                  <a:lnTo>
+                    <a:pt x="2793278" y="1370153"/>
+                  </a:lnTo>
+                  <a:lnTo>
+                    <a:pt x="2864901" y="1357103"/>
+                  </a:lnTo>
+                  <a:lnTo>
+                    <a:pt x="2936523" y="1343824"/>
+                  </a:lnTo>
+                  <a:lnTo>
+                    <a:pt x="3008146" y="1330311"/>
+                  </a:lnTo>
+                  <a:lnTo>
+                    <a:pt x="3079768" y="1316561"/>
+                  </a:lnTo>
+                  <a:lnTo>
+                    <a:pt x="3151391" y="1302569"/>
+                  </a:lnTo>
+                  <a:lnTo>
+                    <a:pt x="3223013" y="1288330"/>
+                  </a:lnTo>
+                  <a:lnTo>
+                    <a:pt x="3294636" y="1273842"/>
+                  </a:lnTo>
+                  <a:lnTo>
+                    <a:pt x="3366258" y="1259098"/>
+                  </a:lnTo>
+                  <a:lnTo>
+                    <a:pt x="3437881" y="1244095"/>
+                  </a:lnTo>
+                  <a:lnTo>
+                    <a:pt x="3509503" y="1228828"/>
+                  </a:lnTo>
+                  <a:lnTo>
+                    <a:pt x="3581126" y="1213293"/>
+                  </a:lnTo>
+                  <a:lnTo>
+                    <a:pt x="3652748" y="1197484"/>
+                  </a:lnTo>
+                  <a:lnTo>
+                    <a:pt x="3724371" y="1181397"/>
+                  </a:lnTo>
+                  <a:lnTo>
+                    <a:pt x="3795993" y="1165028"/>
+                  </a:lnTo>
+                  <a:lnTo>
+                    <a:pt x="3867616" y="1148370"/>
+                  </a:lnTo>
+                  <a:lnTo>
+                    <a:pt x="3939238" y="1131419"/>
+                  </a:lnTo>
+                  <a:lnTo>
+                    <a:pt x="4010861" y="1114170"/>
+                  </a:lnTo>
+                  <a:lnTo>
+                    <a:pt x="4082483" y="1096618"/>
+                  </a:lnTo>
+                  <a:lnTo>
+                    <a:pt x="4154106" y="1078757"/>
+                  </a:lnTo>
+                  <a:lnTo>
+                    <a:pt x="4225729" y="1060582"/>
+                  </a:lnTo>
+                  <a:lnTo>
+                    <a:pt x="4297351" y="1042087"/>
+                  </a:lnTo>
+                  <a:lnTo>
+                    <a:pt x="4368974" y="1023267"/>
+                  </a:lnTo>
+                  <a:lnTo>
+                    <a:pt x="4440596" y="1004115"/>
+                  </a:lnTo>
+                  <a:lnTo>
+                    <a:pt x="4512219" y="984627"/>
+                  </a:lnTo>
+                  <a:lnTo>
+                    <a:pt x="4583841" y="964796"/>
+                  </a:lnTo>
+                  <a:lnTo>
+                    <a:pt x="4655464" y="944617"/>
+                  </a:lnTo>
+                  <a:lnTo>
+                    <a:pt x="4727086" y="924082"/>
+                  </a:lnTo>
+                  <a:lnTo>
+                    <a:pt x="4798709" y="903186"/>
+                  </a:lnTo>
+                  <a:lnTo>
+                    <a:pt x="4870331" y="881923"/>
+                  </a:lnTo>
+                  <a:lnTo>
+                    <a:pt x="4941954" y="860285"/>
+                  </a:lnTo>
+                  <a:lnTo>
+                    <a:pt x="5013576" y="838267"/>
+                  </a:lnTo>
+                  <a:lnTo>
+                    <a:pt x="5085199" y="815861"/>
+                  </a:lnTo>
+                  <a:lnTo>
+                    <a:pt x="5156821" y="793062"/>
+                  </a:lnTo>
+                  <a:lnTo>
+                    <a:pt x="5228444" y="769861"/>
+                  </a:lnTo>
+                  <a:lnTo>
+                    <a:pt x="5300066" y="746253"/>
+                  </a:lnTo>
+                  <a:lnTo>
+                    <a:pt x="5371689" y="722229"/>
+                  </a:lnTo>
+                  <a:lnTo>
+                    <a:pt x="5443311" y="697782"/>
+                  </a:lnTo>
+                  <a:lnTo>
+                    <a:pt x="5514934" y="672906"/>
+                  </a:lnTo>
+                  <a:lnTo>
+                    <a:pt x="5586557" y="647592"/>
+                  </a:lnTo>
+                  <a:lnTo>
+                    <a:pt x="5658179" y="621832"/>
+                  </a:lnTo>
+                  <a:lnTo>
+                    <a:pt x="5729802" y="595620"/>
+                  </a:lnTo>
+                  <a:lnTo>
+                    <a:pt x="5801424" y="568946"/>
+                  </a:lnTo>
+                  <a:lnTo>
+                    <a:pt x="5873047" y="541803"/>
+                  </a:lnTo>
+                  <a:lnTo>
+                    <a:pt x="5944669" y="514183"/>
+                  </a:lnTo>
+                  <a:lnTo>
+                    <a:pt x="6016292" y="486077"/>
+                  </a:lnTo>
+                  <a:lnTo>
+                    <a:pt x="6087914" y="457477"/>
+                  </a:lnTo>
+                  <a:lnTo>
+                    <a:pt x="6159537" y="428373"/>
+                  </a:lnTo>
+                  <a:lnTo>
+                    <a:pt x="6231159" y="398758"/>
+                  </a:lnTo>
+                  <a:lnTo>
+                    <a:pt x="6302782" y="368621"/>
+                  </a:lnTo>
+                  <a:lnTo>
+                    <a:pt x="6374404" y="337955"/>
+                  </a:lnTo>
+                  <a:lnTo>
+                    <a:pt x="6446027" y="306749"/>
+                  </a:lnTo>
+                  <a:lnTo>
+                    <a:pt x="6517649" y="274994"/>
+                  </a:lnTo>
+                  <a:lnTo>
+                    <a:pt x="6589272" y="242681"/>
+                  </a:lnTo>
+                  <a:lnTo>
+                    <a:pt x="6660894" y="209799"/>
+                  </a:lnTo>
+                  <a:lnTo>
+                    <a:pt x="6732517" y="176339"/>
+                  </a:lnTo>
+                  <a:lnTo>
+                    <a:pt x="6804139" y="142290"/>
+                  </a:lnTo>
+                  <a:lnTo>
+                    <a:pt x="6875762" y="107642"/>
+                  </a:lnTo>
+                  <a:lnTo>
+                    <a:pt x="6947385" y="72385"/>
+                  </a:lnTo>
+                  <a:lnTo>
+                    <a:pt x="7019007" y="36508"/>
                   </a:lnTo>
                   <a:lnTo>
                     <a:pt x="7090630" y="0"/>
@@ -4956,7 +4956,7 @@
           </p:nvSpPr>
           <p:spPr>
             <a:xfrm>
-              <a:off x="4401933" y="2073503"/>
+              <a:off x="4423736" y="2073503"/>
               <a:ext cx="0" cy="3649639"/>
             </a:xfrm>
             <a:custGeom>
@@ -4999,7 +4999,7 @@
           </p:nvSpPr>
           <p:spPr>
             <a:xfrm>
-              <a:off x="3507589" y="2073503"/>
+              <a:off x="3470882" y="2073503"/>
               <a:ext cx="0" cy="3649639"/>
             </a:xfrm>
             <a:custGeom>
@@ -5042,7 +5042,7 @@
           </p:nvSpPr>
           <p:spPr>
             <a:xfrm>
-              <a:off x="5433405" y="2073503"/>
+              <a:off x="5437283" y="2073503"/>
               <a:ext cx="0" cy="3649639"/>
             </a:xfrm>
             <a:custGeom>
@@ -5315,7 +5315,7 @@
           </p:nvSpPr>
           <p:spPr>
             <a:xfrm>
-              <a:off x="842324" y="5785772"/>
+              <a:off x="843419" y="5785772"/>
               <a:ext cx="161574" cy="80101"/>
             </a:xfrm>
             <a:prstGeom prst="rect">
@@ -5361,7 +5361,7 @@
           </p:nvSpPr>
           <p:spPr>
             <a:xfrm>
-              <a:off x="1681960" y="5785772"/>
+              <a:off x="1681469" y="5785772"/>
               <a:ext cx="161574" cy="80101"/>
             </a:xfrm>
             <a:prstGeom prst="rect">
@@ -5407,7 +5407,7 @@
           </p:nvSpPr>
           <p:spPr>
             <a:xfrm>
-              <a:off x="2521596" y="5785772"/>
+              <a:off x="2519520" y="5785772"/>
               <a:ext cx="161574" cy="80101"/>
             </a:xfrm>
             <a:prstGeom prst="rect">
@@ -5453,7 +5453,7 @@
           </p:nvSpPr>
           <p:spPr>
             <a:xfrm>
-              <a:off x="3361232" y="5785772"/>
+              <a:off x="3357571" y="5785772"/>
               <a:ext cx="161574" cy="80101"/>
             </a:xfrm>
             <a:prstGeom prst="rect">
@@ -5499,7 +5499,7 @@
           </p:nvSpPr>
           <p:spPr>
             <a:xfrm>
-              <a:off x="4200868" y="5785772"/>
+              <a:off x="4195621" y="5785772"/>
               <a:ext cx="161574" cy="80101"/>
             </a:xfrm>
             <a:prstGeom prst="rect">
@@ -5545,7 +5545,7 @@
           </p:nvSpPr>
           <p:spPr>
             <a:xfrm>
-              <a:off x="5090202" y="5785772"/>
+              <a:off x="5083370" y="5785772"/>
               <a:ext cx="62179" cy="80101"/>
             </a:xfrm>
             <a:prstGeom prst="rect">
@@ -5591,7 +5591,7 @@
           </p:nvSpPr>
           <p:spPr>
             <a:xfrm>
-              <a:off x="5898749" y="5785772"/>
+              <a:off x="5890331" y="5785772"/>
               <a:ext cx="124358" cy="80101"/>
             </a:xfrm>
             <a:prstGeom prst="rect">
@@ -5637,7 +5637,7 @@
           </p:nvSpPr>
           <p:spPr>
             <a:xfrm>
-              <a:off x="6738385" y="5785772"/>
+              <a:off x="6728381" y="5785772"/>
               <a:ext cx="124358" cy="80101"/>
             </a:xfrm>
             <a:prstGeom prst="rect">
@@ -5683,7 +5683,7 @@
           </p:nvSpPr>
           <p:spPr>
             <a:xfrm>
-              <a:off x="7578021" y="5785772"/>
+              <a:off x="7566432" y="5785772"/>
               <a:ext cx="124358" cy="80101"/>
             </a:xfrm>
             <a:prstGeom prst="rect">
@@ -5729,7 +5729,7 @@
           </p:nvSpPr>
           <p:spPr>
             <a:xfrm>
-              <a:off x="8417657" y="5785772"/>
+              <a:off x="8404483" y="5785772"/>
               <a:ext cx="124358" cy="80101"/>
             </a:xfrm>
             <a:prstGeom prst="rect">
@@ -5900,7 +5900,7 @@
                   <a:latin typeface="Helvetica"/>
                   <a:cs typeface="Helvetica"/>
                 </a:rPr>
-                <a:t>subHR per 10 % decline: 0.82 (0.49-1.37), p_Bonf = 1.000 (n = 6)  |  per IQR decline (Δ = 22.9 %): 0.63 (0.19-2.05)  |  IQR: [-19.2, 3.7] %</a:t>
+                <a:t>subHR per 10 % decline: 0.82 (0.49-1.37), p_Bonf = 1.000 (n = 6)  |  per IQR decline (Δ = 23.5 %): 0.62 (0.18-2.08)  |  IQR: [-19.6, 3.9] %</a:t>
               </a:r>
             </a:p>
           </p:txBody>
